--- a/04-proposal/figures/fig-3-request-flow.pptx
+++ b/04-proposal/figures/fig-3-request-flow.pptx
@@ -883,8 +883,47 @@
         </p:nvSpPr>
         <p:spPr>
           <a:xfrm>
-            <a:off x="381000" y="304800"/>
-            <a:ext cx="3385691" cy="336352"/>
+            <a:off x="406301" y="279202"/>
+            <a:ext cx="8498026" cy="104775"/>
+          </a:xfrm>
+          <a:prstGeom prst="rect">
+            <a:avLst/>
+          </a:prstGeom>
+          <a:noFill/>
+          <a:ln/>
+        </p:spPr>
+        <p:txBody>
+          <a:bodyPr wrap="square" lIns="0" tIns="0" rIns="0" bIns="0" rtlCol="0" anchor="t"/>
+          <a:lstStyle/>
+          <a:p>
+            <a:pPr algn="l" indent="0" marL="0">
+              <a:buNone/>
+            </a:pPr>
+            <a:r>
+              <a:rPr lang="en-US" sz="800" b="1" dirty="0">
+                <a:solidFill>
+                  <a:srgbClr val="888888"/>
+                </a:solidFill>
+                <a:latin typeface="Times New Roman" pitchFamily="34" charset="0"/>
+                <a:ea typeface="Times New Roman" pitchFamily="34" charset="-122"/>
+                <a:cs typeface="Times New Roman" pitchFamily="34" charset="-120"/>
+              </a:rPr>
+              <a:t>PHASE 1: Request Ingestion</a:t>
+            </a:r>
+            <a:endParaRPr lang="en-US" sz="800" dirty="0"/>
+          </a:p>
+        </p:txBody>
+      </p:sp>
+      <p:sp>
+        <p:nvSpPr>
+          <p:cNvPr id="3" name="Text 1"/>
+          <p:cNvSpPr/>
+          <p:nvPr/>
+        </p:nvSpPr>
+        <p:spPr>
+          <a:xfrm>
+            <a:off x="304800" y="460028"/>
+            <a:ext cx="1561951" cy="603052"/>
           </a:xfrm>
           <a:prstGeom prst="rect">
             <a:avLst/>
@@ -911,14 +950,14 @@
       </p:sp>
       <p:sp>
         <p:nvSpPr>
-          <p:cNvPr id="3" name="Text 1"/>
-          <p:cNvSpPr/>
-          <p:nvPr/>
-        </p:nvSpPr>
-        <p:spPr>
-          <a:xfrm>
-            <a:off x="431243" y="387251"/>
-            <a:ext cx="3285205" cy="171450"/>
+          <p:cNvPr id="4" name="Text 2"/>
+          <p:cNvSpPr/>
+          <p:nvPr/>
+        </p:nvSpPr>
+        <p:spPr>
+          <a:xfrm>
+            <a:off x="438101" y="580579"/>
+            <a:ext cx="1295349" cy="152400"/>
           </a:xfrm>
           <a:prstGeom prst="rect">
             <a:avLst/>
@@ -934,7 +973,7 @@
               <a:buNone/>
             </a:pPr>
             <a:r>
-              <a:rPr lang="en-US" sz="1200" b="1" dirty="0">
+              <a:rPr lang="en-US" sz="1000" b="1" dirty="0">
                 <a:solidFill>
                   <a:srgbClr val="FFFFFF"/>
                 </a:solidFill>
@@ -942,22 +981,100 @@
                 <a:ea typeface="Times New Roman" pitchFamily="34" charset="-122"/>
                 <a:cs typeface="Times New Roman" pitchFamily="34" charset="-120"/>
               </a:rPr>
-              <a:t>Operating System Domain</a:t>
-            </a:r>
-            <a:endParaRPr lang="en-US" sz="1200" dirty="0"/>
-          </a:p>
-        </p:txBody>
-      </p:sp>
-      <p:sp>
-        <p:nvSpPr>
-          <p:cNvPr id="4" name="Text 2"/>
-          <p:cNvSpPr/>
-          <p:nvPr/>
-        </p:nvSpPr>
-        <p:spPr>
-          <a:xfrm>
-            <a:off x="4342656" y="396776"/>
-            <a:ext cx="467710" cy="152400"/>
+              <a:t>Client</a:t>
+            </a:r>
+            <a:endParaRPr lang="en-US" sz="1000" dirty="0"/>
+          </a:p>
+        </p:txBody>
+      </p:sp>
+      <p:sp>
+        <p:nvSpPr>
+          <p:cNvPr id="5" name="Text 3"/>
+          <p:cNvSpPr/>
+          <p:nvPr/>
+        </p:nvSpPr>
+        <p:spPr>
+          <a:xfrm>
+            <a:off x="438101" y="732979"/>
+            <a:ext cx="1295349" cy="104775"/>
+          </a:xfrm>
+          <a:prstGeom prst="rect">
+            <a:avLst/>
+          </a:prstGeom>
+          <a:noFill/>
+          <a:ln/>
+        </p:spPr>
+        <p:txBody>
+          <a:bodyPr wrap="square" lIns="0" tIns="0" rIns="0" bIns="0" rtlCol="0" anchor="t"/>
+          <a:lstStyle/>
+          <a:p>
+            <a:pPr algn="ctr" indent="0" marL="0">
+              <a:buNone/>
+            </a:pPr>
+            <a:r>
+              <a:rPr lang="en-US" sz="750" dirty="0">
+                <a:solidFill>
+                  <a:srgbClr val="CCCCCC"/>
+                </a:solidFill>
+                <a:latin typeface="Times New Roman" pitchFamily="34" charset="0"/>
+                <a:ea typeface="Times New Roman" pitchFamily="34" charset="-122"/>
+                <a:cs typeface="Times New Roman" pitchFamily="34" charset="-120"/>
+              </a:rPr>
+              <a:t>REST API Call</a:t>
+            </a:r>
+            <a:endParaRPr lang="en-US" sz="750" dirty="0"/>
+          </a:p>
+        </p:txBody>
+      </p:sp>
+      <p:sp>
+        <p:nvSpPr>
+          <p:cNvPr id="6" name="Text 4"/>
+          <p:cNvSpPr/>
+          <p:nvPr/>
+        </p:nvSpPr>
+        <p:spPr>
+          <a:xfrm>
+            <a:off x="438101" y="837754"/>
+            <a:ext cx="1295349" cy="104775"/>
+          </a:xfrm>
+          <a:prstGeom prst="rect">
+            <a:avLst/>
+          </a:prstGeom>
+          <a:noFill/>
+          <a:ln/>
+        </p:spPr>
+        <p:txBody>
+          <a:bodyPr wrap="square" lIns="0" tIns="0" rIns="0" bIns="0" rtlCol="0" anchor="t"/>
+          <a:lstStyle/>
+          <a:p>
+            <a:pPr algn="ctr" indent="0" marL="0">
+              <a:buNone/>
+            </a:pPr>
+            <a:r>
+              <a:rPr lang="en-US" sz="750" dirty="0">
+                <a:solidFill>
+                  <a:srgbClr val="CCCCCC"/>
+                </a:solidFill>
+                <a:latin typeface="Times New Roman" pitchFamily="34" charset="0"/>
+                <a:ea typeface="Times New Roman" pitchFamily="34" charset="-122"/>
+                <a:cs typeface="Times New Roman" pitchFamily="34" charset="-120"/>
+              </a:rPr>
+              <a:t>POST /api/requests</a:t>
+            </a:r>
+            <a:endParaRPr lang="en-US" sz="750" dirty="0"/>
+          </a:p>
+        </p:txBody>
+      </p:sp>
+      <p:sp>
+        <p:nvSpPr>
+          <p:cNvPr id="7" name="Text 5"/>
+          <p:cNvSpPr/>
+          <p:nvPr/>
+        </p:nvSpPr>
+        <p:spPr>
+          <a:xfrm>
+            <a:off x="1942951" y="656779"/>
+            <a:ext cx="181407" cy="209550"/>
           </a:xfrm>
           <a:prstGeom prst="rect">
             <a:avLst/>
@@ -973,36 +1090,36 @@
               <a:buNone/>
             </a:pPr>
             <a:r>
-              <a:rPr lang="en-US" sz="1000" i="1" dirty="0">
-                <a:solidFill>
-                  <a:srgbClr val="999999"/>
-                </a:solidFill>
-                <a:latin typeface="Times New Roman" pitchFamily="34" charset="0"/>
-                <a:ea typeface="Times New Roman" pitchFamily="34" charset="-122"/>
-                <a:cs typeface="Times New Roman" pitchFamily="34" charset="-120"/>
-              </a:rPr>
-              <a:t>Mapping</a:t>
-            </a:r>
-            <a:endParaRPr lang="en-US" sz="1000" dirty="0"/>
-          </a:p>
-        </p:txBody>
-      </p:sp>
-      <p:sp>
-        <p:nvSpPr>
-          <p:cNvPr id="5" name="Text 3"/>
-          <p:cNvSpPr/>
-          <p:nvPr/>
-        </p:nvSpPr>
-        <p:spPr>
-          <a:xfrm>
-            <a:off x="5377160" y="304800"/>
-            <a:ext cx="3385840" cy="336352"/>
+              <a:rPr lang="en-US" sz="1400" dirty="0">
+                <a:solidFill>
+                  <a:srgbClr val="333333"/>
+                </a:solidFill>
+                <a:latin typeface="Times New Roman" pitchFamily="34" charset="0"/>
+                <a:ea typeface="Times New Roman" pitchFamily="34" charset="-122"/>
+                <a:cs typeface="Times New Roman" pitchFamily="34" charset="-120"/>
+              </a:rPr>
+              <a:t>→</a:t>
+            </a:r>
+            <a:endParaRPr lang="en-US" sz="1400" dirty="0"/>
+          </a:p>
+        </p:txBody>
+      </p:sp>
+      <p:sp>
+        <p:nvSpPr>
+          <p:cNvPr id="8" name="Text 6"/>
+          <p:cNvSpPr/>
+          <p:nvPr/>
+        </p:nvSpPr>
+        <p:spPr>
+          <a:xfrm>
+            <a:off x="2197001" y="460028"/>
+            <a:ext cx="4749998" cy="603052"/>
           </a:xfrm>
           <a:prstGeom prst="rect">
             <a:avLst/>
           </a:prstGeom>
           <a:solidFill>
-            <a:srgbClr val="666666"/>
+            <a:srgbClr val="F5F5F5"/>
           </a:solidFill>
           <a:ln w="19050">
             <a:solidFill>
@@ -1023,14 +1140,14 @@
       </p:sp>
       <p:sp>
         <p:nvSpPr>
-          <p:cNvPr id="6" name="Text 4"/>
-          <p:cNvSpPr/>
-          <p:nvPr/>
-        </p:nvSpPr>
-        <p:spPr>
-          <a:xfrm>
-            <a:off x="5427402" y="387251"/>
-            <a:ext cx="3285357" cy="171450"/>
+          <p:cNvPr id="9" name="Text 7"/>
+          <p:cNvSpPr/>
+          <p:nvPr/>
+        </p:nvSpPr>
+        <p:spPr>
+          <a:xfrm>
+            <a:off x="2298421" y="632966"/>
+            <a:ext cx="4547158" cy="152400"/>
           </a:xfrm>
           <a:prstGeom prst="rect">
             <a:avLst/>
@@ -1046,36 +1163,116 @@
               <a:buNone/>
             </a:pPr>
             <a:r>
-              <a:rPr lang="en-US" sz="1200" b="1" dirty="0">
-                <a:solidFill>
-                  <a:srgbClr val="FFFFFF"/>
-                </a:solidFill>
-                <a:latin typeface="Times New Roman" pitchFamily="34" charset="0"/>
-                <a:ea typeface="Times New Roman" pitchFamily="34" charset="-122"/>
-                <a:cs typeface="Times New Roman" pitchFamily="34" charset="-120"/>
-              </a:rPr>
-              <a:t>LLM API Domain</a:t>
-            </a:r>
-            <a:endParaRPr lang="en-US" sz="1200" dirty="0"/>
-          </a:p>
-        </p:txBody>
-      </p:sp>
-      <p:sp>
-        <p:nvSpPr>
-          <p:cNvPr id="7" name="Text 5"/>
-          <p:cNvSpPr/>
-          <p:nvPr/>
-        </p:nvSpPr>
-        <p:spPr>
-          <a:xfrm>
-            <a:off x="381000" y="768102"/>
-            <a:ext cx="3407420" cy="333375"/>
-          </a:xfrm>
-          <a:prstGeom prst="rect">
-            <a:avLst/>
-          </a:prstGeom>
-          <a:noFill/>
-          <a:ln w="9525">
+              <a:rPr lang="en-US" sz="1000" b="1" dirty="0">
+                <a:solidFill>
+                  <a:srgbClr val="333333"/>
+                </a:solidFill>
+                <a:latin typeface="Times New Roman" pitchFamily="34" charset="0"/>
+                <a:ea typeface="Times New Roman" pitchFamily="34" charset="-122"/>
+                <a:cs typeface="Times New Roman" pitchFamily="34" charset="-120"/>
+              </a:rPr>
+              <a:t>API Layer (Express.js)</a:t>
+            </a:r>
+            <a:endParaRPr lang="en-US" sz="1000" dirty="0"/>
+          </a:p>
+        </p:txBody>
+      </p:sp>
+      <p:sp>
+        <p:nvSpPr>
+          <p:cNvPr id="10" name="Text 8"/>
+          <p:cNvSpPr/>
+          <p:nvPr/>
+        </p:nvSpPr>
+        <p:spPr>
+          <a:xfrm>
+            <a:off x="2298421" y="785366"/>
+            <a:ext cx="4547158" cy="104775"/>
+          </a:xfrm>
+          <a:prstGeom prst="rect">
+            <a:avLst/>
+          </a:prstGeom>
+          <a:noFill/>
+          <a:ln/>
+        </p:spPr>
+        <p:txBody>
+          <a:bodyPr wrap="square" lIns="0" tIns="0" rIns="0" bIns="0" rtlCol="0" anchor="t"/>
+          <a:lstStyle/>
+          <a:p>
+            <a:pPr algn="ctr" indent="0" marL="0">
+              <a:buNone/>
+            </a:pPr>
+            <a:r>
+              <a:rPr lang="en-US" sz="750" dirty="0">
+                <a:solidFill>
+                  <a:srgbClr val="666666"/>
+                </a:solidFill>
+                <a:latin typeface="Times New Roman" pitchFamily="34" charset="0"/>
+                <a:ea typeface="Times New Roman" pitchFamily="34" charset="-122"/>
+                <a:cs typeface="Times New Roman" pitchFamily="34" charset="-120"/>
+              </a:rPr>
+              <a:t>Request validation · Tenant identification · Priority assignment</a:t>
+            </a:r>
+            <a:endParaRPr lang="en-US" sz="750" dirty="0"/>
+          </a:p>
+        </p:txBody>
+      </p:sp>
+      <p:sp>
+        <p:nvSpPr>
+          <p:cNvPr id="11" name="Text 9"/>
+          <p:cNvSpPr/>
+          <p:nvPr/>
+        </p:nvSpPr>
+        <p:spPr>
+          <a:xfrm>
+            <a:off x="7023199" y="656779"/>
+            <a:ext cx="181407" cy="209550"/>
+          </a:xfrm>
+          <a:prstGeom prst="rect">
+            <a:avLst/>
+          </a:prstGeom>
+          <a:noFill/>
+          <a:ln/>
+        </p:spPr>
+        <p:txBody>
+          <a:bodyPr wrap="square" lIns="0" tIns="0" rIns="0" bIns="0" rtlCol="0" anchor="t"/>
+          <a:lstStyle/>
+          <a:p>
+            <a:pPr algn="l" indent="0" marL="0">
+              <a:buNone/>
+            </a:pPr>
+            <a:r>
+              <a:rPr lang="en-US" sz="1400" dirty="0">
+                <a:solidFill>
+                  <a:srgbClr val="333333"/>
+                </a:solidFill>
+                <a:latin typeface="Times New Roman" pitchFamily="34" charset="0"/>
+                <a:ea typeface="Times New Roman" pitchFamily="34" charset="-122"/>
+                <a:cs typeface="Times New Roman" pitchFamily="34" charset="-120"/>
+              </a:rPr>
+              <a:t>→</a:t>
+            </a:r>
+            <a:endParaRPr lang="en-US" sz="1400" dirty="0"/>
+          </a:p>
+        </p:txBody>
+      </p:sp>
+      <p:sp>
+        <p:nvSpPr>
+          <p:cNvPr id="12" name="Text 10"/>
+          <p:cNvSpPr/>
+          <p:nvPr/>
+        </p:nvSpPr>
+        <p:spPr>
+          <a:xfrm>
+            <a:off x="7277249" y="460028"/>
+            <a:ext cx="1561951" cy="603052"/>
+          </a:xfrm>
+          <a:prstGeom prst="rect">
+            <a:avLst/>
+          </a:prstGeom>
+          <a:solidFill>
+            <a:srgbClr val="F5F5F5"/>
+          </a:solidFill>
+          <a:ln w="19050">
             <a:solidFill>
               <a:srgbClr val="333333"/>
             </a:solidFill>
@@ -1094,14 +1291,131 @@
       </p:sp>
       <p:sp>
         <p:nvSpPr>
-          <p:cNvPr id="8" name="Text 6"/>
-          <p:cNvSpPr/>
-          <p:nvPr/>
-        </p:nvSpPr>
-        <p:spPr>
-          <a:xfrm>
-            <a:off x="1861096" y="853827"/>
-            <a:ext cx="456173" cy="161925"/>
+          <p:cNvPr id="13" name="Text 11"/>
+          <p:cNvSpPr/>
+          <p:nvPr/>
+        </p:nvSpPr>
+        <p:spPr>
+          <a:xfrm>
+            <a:off x="7410550" y="585341"/>
+            <a:ext cx="1295349" cy="152400"/>
+          </a:xfrm>
+          <a:prstGeom prst="rect">
+            <a:avLst/>
+          </a:prstGeom>
+          <a:noFill/>
+          <a:ln/>
+        </p:spPr>
+        <p:txBody>
+          <a:bodyPr wrap="square" lIns="0" tIns="0" rIns="0" bIns="0" rtlCol="0" anchor="t"/>
+          <a:lstStyle/>
+          <a:p>
+            <a:pPr algn="ctr" indent="0" marL="0">
+              <a:buNone/>
+            </a:pPr>
+            <a:r>
+              <a:rPr lang="en-US" sz="1000" b="1" dirty="0">
+                <a:solidFill>
+                  <a:srgbClr val="333333"/>
+                </a:solidFill>
+                <a:latin typeface="Times New Roman" pitchFamily="34" charset="0"/>
+                <a:ea typeface="Times New Roman" pitchFamily="34" charset="-122"/>
+                <a:cs typeface="Times New Roman" pitchFamily="34" charset="-120"/>
+              </a:rPr>
+              <a:t>Rate Limiter</a:t>
+            </a:r>
+            <a:endParaRPr lang="en-US" sz="1000" dirty="0"/>
+          </a:p>
+        </p:txBody>
+      </p:sp>
+      <p:sp>
+        <p:nvSpPr>
+          <p:cNvPr id="14" name="Text 12"/>
+          <p:cNvSpPr/>
+          <p:nvPr/>
+        </p:nvSpPr>
+        <p:spPr>
+          <a:xfrm>
+            <a:off x="7410550" y="737741"/>
+            <a:ext cx="1295349" cy="104775"/>
+          </a:xfrm>
+          <a:prstGeom prst="rect">
+            <a:avLst/>
+          </a:prstGeom>
+          <a:noFill/>
+          <a:ln/>
+        </p:spPr>
+        <p:txBody>
+          <a:bodyPr wrap="square" lIns="0" tIns="0" rIns="0" bIns="0" rtlCol="0" anchor="t"/>
+          <a:lstStyle/>
+          <a:p>
+            <a:pPr algn="ctr" indent="0" marL="0">
+              <a:buNone/>
+            </a:pPr>
+            <a:r>
+              <a:rPr lang="en-US" sz="750" dirty="0">
+                <a:solidFill>
+                  <a:srgbClr val="666666"/>
+                </a:solidFill>
+                <a:latin typeface="Times New Roman" pitchFamily="34" charset="0"/>
+                <a:ea typeface="Times New Roman" pitchFamily="34" charset="-122"/>
+                <a:cs typeface="Times New Roman" pitchFamily="34" charset="-120"/>
+              </a:rPr>
+              <a:t>Token Bucket check</a:t>
+            </a:r>
+            <a:endParaRPr lang="en-US" sz="750" dirty="0"/>
+          </a:p>
+        </p:txBody>
+      </p:sp>
+      <p:sp>
+        <p:nvSpPr>
+          <p:cNvPr id="15" name="Text 13"/>
+          <p:cNvSpPr/>
+          <p:nvPr/>
+        </p:nvSpPr>
+        <p:spPr>
+          <a:xfrm>
+            <a:off x="7410550" y="842516"/>
+            <a:ext cx="1295349" cy="95250"/>
+          </a:xfrm>
+          <a:prstGeom prst="rect">
+            <a:avLst/>
+          </a:prstGeom>
+          <a:noFill/>
+          <a:ln/>
+        </p:spPr>
+        <p:txBody>
+          <a:bodyPr wrap="square" lIns="0" tIns="0" rIns="0" bIns="0" rtlCol="0" anchor="t"/>
+          <a:lstStyle/>
+          <a:p>
+            <a:pPr algn="ctr" indent="0" marL="0">
+              <a:buNone/>
+            </a:pPr>
+            <a:r>
+              <a:rPr lang="en-US" sz="700" i="1" dirty="0">
+                <a:solidFill>
+                  <a:srgbClr val="999999"/>
+                </a:solidFill>
+                <a:latin typeface="Times New Roman" pitchFamily="34" charset="0"/>
+                <a:ea typeface="Times New Roman" pitchFamily="34" charset="-122"/>
+                <a:cs typeface="Times New Roman" pitchFamily="34" charset="-120"/>
+              </a:rPr>
+              <a:t>Reject if over limit</a:t>
+            </a:r>
+            <a:endParaRPr lang="en-US" sz="700" dirty="0"/>
+          </a:p>
+        </p:txBody>
+      </p:sp>
+      <p:sp>
+        <p:nvSpPr>
+          <p:cNvPr id="16" name="Text 14"/>
+          <p:cNvSpPr/>
+          <p:nvPr/>
+        </p:nvSpPr>
+        <p:spPr>
+          <a:xfrm>
+            <a:off x="4496544" y="1113681"/>
+            <a:ext cx="153930" cy="171450"/>
           </a:xfrm>
           <a:prstGeom prst="rect">
             <a:avLst/>
@@ -1117,7 +1431,119 @@
               <a:buNone/>
             </a:pPr>
             <a:r>
-              <a:rPr lang="en-US" sz="1100" b="1" dirty="0">
+              <a:rPr lang="en-US" sz="1200" dirty="0">
+                <a:solidFill>
+                  <a:srgbClr val="888888"/>
+                </a:solidFill>
+                <a:latin typeface="Times New Roman" pitchFamily="34" charset="0"/>
+                <a:ea typeface="Times New Roman" pitchFamily="34" charset="-122"/>
+                <a:cs typeface="Times New Roman" pitchFamily="34" charset="-120"/>
+              </a:rPr>
+              <a:t>▼</a:t>
+            </a:r>
+            <a:endParaRPr lang="en-US" sz="1200" dirty="0"/>
+          </a:p>
+        </p:txBody>
+      </p:sp>
+      <p:sp>
+        <p:nvSpPr>
+          <p:cNvPr id="17" name="Text 15"/>
+          <p:cNvSpPr/>
+          <p:nvPr/>
+        </p:nvSpPr>
+        <p:spPr>
+          <a:xfrm>
+            <a:off x="406301" y="1335732"/>
+            <a:ext cx="8498026" cy="104775"/>
+          </a:xfrm>
+          <a:prstGeom prst="rect">
+            <a:avLst/>
+          </a:prstGeom>
+          <a:noFill/>
+          <a:ln/>
+        </p:spPr>
+        <p:txBody>
+          <a:bodyPr wrap="square" lIns="0" tIns="0" rIns="0" bIns="0" rtlCol="0" anchor="t"/>
+          <a:lstStyle/>
+          <a:p>
+            <a:pPr algn="l" indent="0" marL="0">
+              <a:buNone/>
+            </a:pPr>
+            <a:r>
+              <a:rPr lang="en-US" sz="800" b="1" dirty="0">
+                <a:solidFill>
+                  <a:srgbClr val="888888"/>
+                </a:solidFill>
+                <a:latin typeface="Times New Roman" pitchFamily="34" charset="0"/>
+                <a:ea typeface="Times New Roman" pitchFamily="34" charset="-122"/>
+                <a:cs typeface="Times New Roman" pitchFamily="34" charset="-120"/>
+              </a:rPr>
+              <a:t>PHASE 2: Scheduling Decision (Runtime-Swappable)</a:t>
+            </a:r>
+            <a:endParaRPr lang="en-US" sz="800" dirty="0"/>
+          </a:p>
+        </p:txBody>
+      </p:sp>
+      <p:sp>
+        <p:nvSpPr>
+          <p:cNvPr id="18" name="Text 16"/>
+          <p:cNvSpPr/>
+          <p:nvPr/>
+        </p:nvSpPr>
+        <p:spPr>
+          <a:xfrm>
+            <a:off x="304800" y="1516559"/>
+            <a:ext cx="2076450" cy="504825"/>
+          </a:xfrm>
+          <a:prstGeom prst="rect">
+            <a:avLst/>
+          </a:prstGeom>
+          <a:solidFill>
+            <a:srgbClr val="E8E8E8"/>
+          </a:solidFill>
+          <a:ln w="9525">
+            <a:solidFill>
+              <a:srgbClr val="555555"/>
+            </a:solidFill>
+          </a:ln>
+        </p:spPr>
+        <p:txBody>
+          <a:bodyPr wrap="square" rtlCol="0" anchor="ctr"/>
+          <a:lstStyle/>
+          <a:p>
+            <a:pPr indent="0" marL="0">
+              <a:buNone/>
+            </a:pPr>
+            <a:endParaRPr lang="en-US" dirty="0"/>
+          </a:p>
+        </p:txBody>
+      </p:sp>
+      <p:sp>
+        <p:nvSpPr>
+          <p:cNvPr id="19" name="Text 17"/>
+          <p:cNvSpPr/>
+          <p:nvPr/>
+        </p:nvSpPr>
+        <p:spPr>
+          <a:xfrm>
+            <a:off x="397282" y="1649909"/>
+            <a:ext cx="1891486" cy="142875"/>
+          </a:xfrm>
+          <a:prstGeom prst="rect">
+            <a:avLst/>
+          </a:prstGeom>
+          <a:noFill/>
+          <a:ln/>
+        </p:spPr>
+        <p:txBody>
+          <a:bodyPr wrap="square" lIns="0" tIns="0" rIns="0" bIns="0" rtlCol="0" anchor="t"/>
+          <a:lstStyle/>
+          <a:p>
+            <a:pPr algn="ctr" indent="0" marL="0">
+              <a:buNone/>
+            </a:pPr>
+            <a:r>
+              <a:rPr lang="en-US" sz="900" b="1" dirty="0">
                 <a:solidFill>
                   <a:srgbClr val="333333"/>
                 </a:solidFill>
@@ -1125,22 +1551,475 @@
                 <a:ea typeface="Times New Roman" pitchFamily="34" charset="-122"/>
                 <a:cs typeface="Times New Roman" pitchFamily="34" charset="-120"/>
               </a:rPr>
-              <a:t>Process</a:t>
-            </a:r>
-            <a:endParaRPr lang="en-US" sz="1100" dirty="0"/>
-          </a:p>
-        </p:txBody>
-      </p:sp>
-      <p:sp>
-        <p:nvSpPr>
-          <p:cNvPr id="9" name="Text 7"/>
-          <p:cNvSpPr/>
-          <p:nvPr/>
-        </p:nvSpPr>
-        <p:spPr>
-          <a:xfrm>
-            <a:off x="4483001" y="777627"/>
-            <a:ext cx="181407" cy="209550"/>
+              <a:t>FCFS</a:t>
+            </a:r>
+            <a:endParaRPr lang="en-US" sz="900" dirty="0"/>
+          </a:p>
+        </p:txBody>
+      </p:sp>
+      <p:sp>
+        <p:nvSpPr>
+          <p:cNvPr id="20" name="Text 18"/>
+          <p:cNvSpPr/>
+          <p:nvPr/>
+        </p:nvSpPr>
+        <p:spPr>
+          <a:xfrm>
+            <a:off x="397282" y="1792784"/>
+            <a:ext cx="1891486" cy="95250"/>
+          </a:xfrm>
+          <a:prstGeom prst="rect">
+            <a:avLst/>
+          </a:prstGeom>
+          <a:noFill/>
+          <a:ln/>
+        </p:spPr>
+        <p:txBody>
+          <a:bodyPr wrap="square" lIns="0" tIns="0" rIns="0" bIns="0" rtlCol="0" anchor="t"/>
+          <a:lstStyle/>
+          <a:p>
+            <a:pPr algn="ctr" indent="0" marL="0">
+              <a:buNone/>
+            </a:pPr>
+            <a:r>
+              <a:rPr lang="en-US" sz="700" dirty="0">
+                <a:solidFill>
+                  <a:srgbClr val="666666"/>
+                </a:solidFill>
+                <a:latin typeface="Times New Roman" pitchFamily="34" charset="0"/>
+                <a:ea typeface="Times New Roman" pitchFamily="34" charset="-122"/>
+                <a:cs typeface="Times New Roman" pitchFamily="34" charset="-120"/>
+              </a:rPr>
+              <a:t>Arrival order</a:t>
+            </a:r>
+            <a:endParaRPr lang="en-US" sz="700" dirty="0"/>
+          </a:p>
+        </p:txBody>
+      </p:sp>
+      <p:sp>
+        <p:nvSpPr>
+          <p:cNvPr id="21" name="Text 19"/>
+          <p:cNvSpPr/>
+          <p:nvPr/>
+        </p:nvSpPr>
+        <p:spPr>
+          <a:xfrm>
+            <a:off x="2457450" y="1516559"/>
+            <a:ext cx="2076450" cy="504825"/>
+          </a:xfrm>
+          <a:prstGeom prst="rect">
+            <a:avLst/>
+          </a:prstGeom>
+          <a:solidFill>
+            <a:srgbClr val="E8E8E8"/>
+          </a:solidFill>
+          <a:ln w="9525">
+            <a:solidFill>
+              <a:srgbClr val="555555"/>
+            </a:solidFill>
+          </a:ln>
+        </p:spPr>
+        <p:txBody>
+          <a:bodyPr wrap="square" rtlCol="0" anchor="ctr"/>
+          <a:lstStyle/>
+          <a:p>
+            <a:pPr indent="0" marL="0">
+              <a:buNone/>
+            </a:pPr>
+            <a:endParaRPr lang="en-US" dirty="0"/>
+          </a:p>
+        </p:txBody>
+      </p:sp>
+      <p:sp>
+        <p:nvSpPr>
+          <p:cNvPr id="22" name="Text 20"/>
+          <p:cNvSpPr/>
+          <p:nvPr/>
+        </p:nvSpPr>
+        <p:spPr>
+          <a:xfrm>
+            <a:off x="2549932" y="1649909"/>
+            <a:ext cx="1891486" cy="142875"/>
+          </a:xfrm>
+          <a:prstGeom prst="rect">
+            <a:avLst/>
+          </a:prstGeom>
+          <a:noFill/>
+          <a:ln/>
+        </p:spPr>
+        <p:txBody>
+          <a:bodyPr wrap="square" lIns="0" tIns="0" rIns="0" bIns="0" rtlCol="0" anchor="t"/>
+          <a:lstStyle/>
+          <a:p>
+            <a:pPr algn="ctr" indent="0" marL="0">
+              <a:buNone/>
+            </a:pPr>
+            <a:r>
+              <a:rPr lang="en-US" sz="900" b="1" dirty="0">
+                <a:solidFill>
+                  <a:srgbClr val="333333"/>
+                </a:solidFill>
+                <a:latin typeface="Times New Roman" pitchFamily="34" charset="0"/>
+                <a:ea typeface="Times New Roman" pitchFamily="34" charset="-122"/>
+                <a:cs typeface="Times New Roman" pitchFamily="34" charset="-120"/>
+              </a:rPr>
+              <a:t>Priority</a:t>
+            </a:r>
+            <a:endParaRPr lang="en-US" sz="900" dirty="0"/>
+          </a:p>
+        </p:txBody>
+      </p:sp>
+      <p:sp>
+        <p:nvSpPr>
+          <p:cNvPr id="23" name="Text 21"/>
+          <p:cNvSpPr/>
+          <p:nvPr/>
+        </p:nvSpPr>
+        <p:spPr>
+          <a:xfrm>
+            <a:off x="2549932" y="1792784"/>
+            <a:ext cx="1891486" cy="95250"/>
+          </a:xfrm>
+          <a:prstGeom prst="rect">
+            <a:avLst/>
+          </a:prstGeom>
+          <a:noFill/>
+          <a:ln/>
+        </p:spPr>
+        <p:txBody>
+          <a:bodyPr wrap="square" lIns="0" tIns="0" rIns="0" bIns="0" rtlCol="0" anchor="t"/>
+          <a:lstStyle/>
+          <a:p>
+            <a:pPr algn="ctr" indent="0" marL="0">
+              <a:buNone/>
+            </a:pPr>
+            <a:r>
+              <a:rPr lang="en-US" sz="700" dirty="0">
+                <a:solidFill>
+                  <a:srgbClr val="666666"/>
+                </a:solidFill>
+                <a:latin typeface="Times New Roman" pitchFamily="34" charset="0"/>
+                <a:ea typeface="Times New Roman" pitchFamily="34" charset="-122"/>
+                <a:cs typeface="Times New Roman" pitchFamily="34" charset="-120"/>
+              </a:rPr>
+              <a:t>4-level + Aging</a:t>
+            </a:r>
+            <a:endParaRPr lang="en-US" sz="700" dirty="0"/>
+          </a:p>
+        </p:txBody>
+      </p:sp>
+      <p:sp>
+        <p:nvSpPr>
+          <p:cNvPr id="24" name="Text 22"/>
+          <p:cNvSpPr/>
+          <p:nvPr/>
+        </p:nvSpPr>
+        <p:spPr>
+          <a:xfrm>
+            <a:off x="4610100" y="1516559"/>
+            <a:ext cx="2076450" cy="504825"/>
+          </a:xfrm>
+          <a:prstGeom prst="rect">
+            <a:avLst/>
+          </a:prstGeom>
+          <a:solidFill>
+            <a:srgbClr val="D5E8F0"/>
+          </a:solidFill>
+          <a:ln w="9525">
+            <a:solidFill>
+              <a:srgbClr val="2B579A"/>
+            </a:solidFill>
+          </a:ln>
+        </p:spPr>
+        <p:txBody>
+          <a:bodyPr wrap="square" rtlCol="0" anchor="ctr"/>
+          <a:lstStyle/>
+          <a:p>
+            <a:pPr indent="0" marL="0">
+              <a:buNone/>
+            </a:pPr>
+            <a:endParaRPr lang="en-US" dirty="0"/>
+          </a:p>
+        </p:txBody>
+      </p:sp>
+      <p:sp>
+        <p:nvSpPr>
+          <p:cNvPr id="25" name="Text 23"/>
+          <p:cNvSpPr/>
+          <p:nvPr/>
+        </p:nvSpPr>
+        <p:spPr>
+          <a:xfrm>
+            <a:off x="4702582" y="1602284"/>
+            <a:ext cx="1891486" cy="142875"/>
+          </a:xfrm>
+          <a:prstGeom prst="rect">
+            <a:avLst/>
+          </a:prstGeom>
+          <a:noFill/>
+          <a:ln/>
+        </p:spPr>
+        <p:txBody>
+          <a:bodyPr wrap="square" lIns="0" tIns="0" rIns="0" bIns="0" rtlCol="0" anchor="t"/>
+          <a:lstStyle/>
+          <a:p>
+            <a:pPr algn="ctr" indent="0" marL="0">
+              <a:buNone/>
+            </a:pPr>
+            <a:r>
+              <a:rPr lang="en-US" sz="900" b="1" dirty="0">
+                <a:solidFill>
+                  <a:srgbClr val="2B579A"/>
+                </a:solidFill>
+                <a:latin typeface="Times New Roman" pitchFamily="34" charset="0"/>
+                <a:ea typeface="Times New Roman" pitchFamily="34" charset="-122"/>
+                <a:cs typeface="Times New Roman" pitchFamily="34" charset="-120"/>
+              </a:rPr>
+              <a:t>MLFQ</a:t>
+            </a:r>
+            <a:endParaRPr lang="en-US" sz="900" dirty="0"/>
+          </a:p>
+        </p:txBody>
+      </p:sp>
+      <p:sp>
+        <p:nvSpPr>
+          <p:cNvPr id="26" name="Text 24"/>
+          <p:cNvSpPr/>
+          <p:nvPr/>
+        </p:nvSpPr>
+        <p:spPr>
+          <a:xfrm>
+            <a:off x="4702582" y="1745159"/>
+            <a:ext cx="1891486" cy="95250"/>
+          </a:xfrm>
+          <a:prstGeom prst="rect">
+            <a:avLst/>
+          </a:prstGeom>
+          <a:noFill/>
+          <a:ln/>
+        </p:spPr>
+        <p:txBody>
+          <a:bodyPr wrap="square" lIns="0" tIns="0" rIns="0" bIns="0" rtlCol="0" anchor="t"/>
+          <a:lstStyle/>
+          <a:p>
+            <a:pPr algn="ctr" indent="0" marL="0">
+              <a:buNone/>
+            </a:pPr>
+            <a:r>
+              <a:rPr lang="en-US" sz="700" dirty="0">
+                <a:solidFill>
+                  <a:srgbClr val="555555"/>
+                </a:solidFill>
+                <a:latin typeface="Times New Roman" pitchFamily="34" charset="0"/>
+                <a:ea typeface="Times New Roman" pitchFamily="34" charset="-122"/>
+                <a:cs typeface="Times New Roman" pitchFamily="34" charset="-120"/>
+              </a:rPr>
+              <a:t>4 queues + Preemption</a:t>
+            </a:r>
+            <a:endParaRPr lang="en-US" sz="700" dirty="0"/>
+          </a:p>
+        </p:txBody>
+      </p:sp>
+      <p:sp>
+        <p:nvSpPr>
+          <p:cNvPr id="27" name="Text 25"/>
+          <p:cNvSpPr/>
+          <p:nvPr/>
+        </p:nvSpPr>
+        <p:spPr>
+          <a:xfrm>
+            <a:off x="4702582" y="1840409"/>
+            <a:ext cx="1891486" cy="95250"/>
+          </a:xfrm>
+          <a:prstGeom prst="rect">
+            <a:avLst/>
+          </a:prstGeom>
+          <a:noFill/>
+          <a:ln/>
+        </p:spPr>
+        <p:txBody>
+          <a:bodyPr wrap="square" lIns="0" tIns="0" rIns="0" bIns="0" rtlCol="0" anchor="t"/>
+          <a:lstStyle/>
+          <a:p>
+            <a:pPr algn="ctr" indent="0" marL="0">
+              <a:buNone/>
+            </a:pPr>
+            <a:r>
+              <a:rPr lang="en-US" sz="650" i="1" dirty="0">
+                <a:solidFill>
+                  <a:srgbClr val="888888"/>
+                </a:solidFill>
+                <a:latin typeface="Times New Roman" pitchFamily="34" charset="0"/>
+                <a:ea typeface="Times New Roman" pitchFamily="34" charset="-122"/>
+                <a:cs typeface="Times New Roman" pitchFamily="34" charset="-120"/>
+              </a:rPr>
+              <a:t>Q0:500ms Q1:1.5s Q2:4s Q3:∞</a:t>
+            </a:r>
+            <a:endParaRPr lang="en-US" sz="650" dirty="0"/>
+          </a:p>
+        </p:txBody>
+      </p:sp>
+      <p:sp>
+        <p:nvSpPr>
+          <p:cNvPr id="28" name="Text 26"/>
+          <p:cNvSpPr/>
+          <p:nvPr/>
+        </p:nvSpPr>
+        <p:spPr>
+          <a:xfrm>
+            <a:off x="6762750" y="1516559"/>
+            <a:ext cx="2076450" cy="504825"/>
+          </a:xfrm>
+          <a:prstGeom prst="rect">
+            <a:avLst/>
+          </a:prstGeom>
+          <a:solidFill>
+            <a:srgbClr val="D5E8F0"/>
+          </a:solidFill>
+          <a:ln w="9525">
+            <a:solidFill>
+              <a:srgbClr val="2B579A"/>
+            </a:solidFill>
+          </a:ln>
+        </p:spPr>
+        <p:txBody>
+          <a:bodyPr wrap="square" rtlCol="0" anchor="ctr"/>
+          <a:lstStyle/>
+          <a:p>
+            <a:pPr indent="0" marL="0">
+              <a:buNone/>
+            </a:pPr>
+            <a:endParaRPr lang="en-US" dirty="0"/>
+          </a:p>
+        </p:txBody>
+      </p:sp>
+      <p:sp>
+        <p:nvSpPr>
+          <p:cNvPr id="29" name="Text 27"/>
+          <p:cNvSpPr/>
+          <p:nvPr/>
+        </p:nvSpPr>
+        <p:spPr>
+          <a:xfrm>
+            <a:off x="6855232" y="1602284"/>
+            <a:ext cx="1891486" cy="142875"/>
+          </a:xfrm>
+          <a:prstGeom prst="rect">
+            <a:avLst/>
+          </a:prstGeom>
+          <a:noFill/>
+          <a:ln/>
+        </p:spPr>
+        <p:txBody>
+          <a:bodyPr wrap="square" lIns="0" tIns="0" rIns="0" bIns="0" rtlCol="0" anchor="t"/>
+          <a:lstStyle/>
+          <a:p>
+            <a:pPr algn="ctr" indent="0" marL="0">
+              <a:buNone/>
+            </a:pPr>
+            <a:r>
+              <a:rPr lang="en-US" sz="900" b="1" dirty="0">
+                <a:solidFill>
+                  <a:srgbClr val="2B579A"/>
+                </a:solidFill>
+                <a:latin typeface="Times New Roman" pitchFamily="34" charset="0"/>
+                <a:ea typeface="Times New Roman" pitchFamily="34" charset="-122"/>
+                <a:cs typeface="Times New Roman" pitchFamily="34" charset="-120"/>
+              </a:rPr>
+              <a:t>WFQ</a:t>
+            </a:r>
+            <a:endParaRPr lang="en-US" sz="900" dirty="0"/>
+          </a:p>
+        </p:txBody>
+      </p:sp>
+      <p:sp>
+        <p:nvSpPr>
+          <p:cNvPr id="30" name="Text 28"/>
+          <p:cNvSpPr/>
+          <p:nvPr/>
+        </p:nvSpPr>
+        <p:spPr>
+          <a:xfrm>
+            <a:off x="6855232" y="1745159"/>
+            <a:ext cx="1891486" cy="95250"/>
+          </a:xfrm>
+          <a:prstGeom prst="rect">
+            <a:avLst/>
+          </a:prstGeom>
+          <a:noFill/>
+          <a:ln/>
+        </p:spPr>
+        <p:txBody>
+          <a:bodyPr wrap="square" lIns="0" tIns="0" rIns="0" bIns="0" rtlCol="0" anchor="t"/>
+          <a:lstStyle/>
+          <a:p>
+            <a:pPr algn="ctr" indent="0" marL="0">
+              <a:buNone/>
+            </a:pPr>
+            <a:r>
+              <a:rPr lang="en-US" sz="700" dirty="0">
+                <a:solidFill>
+                  <a:srgbClr val="555555"/>
+                </a:solidFill>
+                <a:latin typeface="Times New Roman" pitchFamily="34" charset="0"/>
+                <a:ea typeface="Times New Roman" pitchFamily="34" charset="-122"/>
+                <a:cs typeface="Times New Roman" pitchFamily="34" charset="-120"/>
+              </a:rPr>
+              <a:t>Virtual Finish Time</a:t>
+            </a:r>
+            <a:endParaRPr lang="en-US" sz="700" dirty="0"/>
+          </a:p>
+        </p:txBody>
+      </p:sp>
+      <p:sp>
+        <p:nvSpPr>
+          <p:cNvPr id="31" name="Text 29"/>
+          <p:cNvSpPr/>
+          <p:nvPr/>
+        </p:nvSpPr>
+        <p:spPr>
+          <a:xfrm>
+            <a:off x="6855232" y="1840409"/>
+            <a:ext cx="1891486" cy="95250"/>
+          </a:xfrm>
+          <a:prstGeom prst="rect">
+            <a:avLst/>
+          </a:prstGeom>
+          <a:noFill/>
+          <a:ln/>
+        </p:spPr>
+        <p:txBody>
+          <a:bodyPr wrap="square" lIns="0" tIns="0" rIns="0" bIns="0" rtlCol="0" anchor="t"/>
+          <a:lstStyle/>
+          <a:p>
+            <a:pPr algn="ctr" indent="0" marL="0">
+              <a:buNone/>
+            </a:pPr>
+            <a:r>
+              <a:rPr lang="en-US" sz="650" i="1" dirty="0">
+                <a:solidFill>
+                  <a:srgbClr val="888888"/>
+                </a:solidFill>
+                <a:latin typeface="Times New Roman" pitchFamily="34" charset="0"/>
+                <a:ea typeface="Times New Roman" pitchFamily="34" charset="-122"/>
+                <a:cs typeface="Times New Roman" pitchFamily="34" charset="-120"/>
+              </a:rPr>
+              <a:t>Weight: 100/50/10/1</a:t>
+            </a:r>
+            <a:endParaRPr lang="en-US" sz="650" dirty="0"/>
+          </a:p>
+        </p:txBody>
+      </p:sp>
+      <p:sp>
+        <p:nvSpPr>
+          <p:cNvPr id="32" name="Text 30"/>
+          <p:cNvSpPr/>
+          <p:nvPr/>
+        </p:nvSpPr>
+        <p:spPr>
+          <a:xfrm>
+            <a:off x="3484513" y="2059335"/>
+            <a:ext cx="2218322" cy="95250"/>
           </a:xfrm>
           <a:prstGeom prst="rect">
             <a:avLst/>
@@ -1156,30 +2035,30 @@
               <a:buNone/>
             </a:pPr>
             <a:r>
-              <a:rPr lang="en-US" sz="1400" dirty="0">
-                <a:solidFill>
-                  <a:srgbClr val="333333"/>
-                </a:solidFill>
-                <a:latin typeface="Times New Roman" pitchFamily="34" charset="0"/>
-                <a:ea typeface="Times New Roman" pitchFamily="34" charset="-122"/>
-                <a:cs typeface="Times New Roman" pitchFamily="34" charset="-120"/>
-              </a:rPr>
-              <a:t>→</a:t>
-            </a:r>
-            <a:endParaRPr lang="en-US" sz="1400" dirty="0"/>
-          </a:p>
-        </p:txBody>
-      </p:sp>
-      <p:sp>
-        <p:nvSpPr>
-          <p:cNvPr id="10" name="Text 8"/>
-          <p:cNvSpPr/>
-          <p:nvPr/>
-        </p:nvSpPr>
-        <p:spPr>
-          <a:xfrm>
-            <a:off x="4274344" y="987177"/>
-            <a:ext cx="607219" cy="104775"/>
+              <a:rPr lang="en-US" sz="700" i="1" dirty="0">
+                <a:solidFill>
+                  <a:srgbClr val="999999"/>
+                </a:solidFill>
+                <a:latin typeface="Times New Roman" pitchFamily="34" charset="0"/>
+                <a:ea typeface="Times New Roman" pitchFamily="34" charset="-122"/>
+                <a:cs typeface="Times New Roman" pitchFamily="34" charset="-120"/>
+              </a:rPr>
+              <a:t>PUT /api/scheduler → Runtime algorithm switch (no restart)</a:t>
+            </a:r>
+            <a:endParaRPr lang="en-US" sz="700" dirty="0"/>
+          </a:p>
+        </p:txBody>
+      </p:sp>
+      <p:sp>
+        <p:nvSpPr>
+          <p:cNvPr id="33" name="Text 31"/>
+          <p:cNvSpPr/>
+          <p:nvPr/>
+        </p:nvSpPr>
+        <p:spPr>
+          <a:xfrm>
+            <a:off x="4496544" y="2192536"/>
+            <a:ext cx="153930" cy="171450"/>
           </a:xfrm>
           <a:prstGeom prst="rect">
             <a:avLst/>
@@ -1195,7 +2074,7 @@
               <a:buNone/>
             </a:pPr>
             <a:r>
-              <a:rPr lang="en-US" sz="750" i="1" dirty="0">
+              <a:rPr lang="en-US" sz="1200" dirty="0">
                 <a:solidFill>
                   <a:srgbClr val="888888"/>
                 </a:solidFill>
@@ -1203,22 +2082,61 @@
                 <a:ea typeface="Times New Roman" pitchFamily="34" charset="-122"/>
                 <a:cs typeface="Times New Roman" pitchFamily="34" charset="-120"/>
               </a:rPr>
-              <a:t>Scheduling unit</a:t>
-            </a:r>
-            <a:endParaRPr lang="en-US" sz="750" dirty="0"/>
-          </a:p>
-        </p:txBody>
-      </p:sp>
-      <p:sp>
-        <p:nvSpPr>
-          <p:cNvPr id="11" name="Text 9"/>
-          <p:cNvSpPr/>
-          <p:nvPr/>
-        </p:nvSpPr>
-        <p:spPr>
-          <a:xfrm>
-            <a:off x="5355580" y="768102"/>
-            <a:ext cx="3407420" cy="333375"/>
+              <a:t>▼</a:t>
+            </a:r>
+            <a:endParaRPr lang="en-US" sz="1200" dirty="0"/>
+          </a:p>
+        </p:txBody>
+      </p:sp>
+      <p:sp>
+        <p:nvSpPr>
+          <p:cNvPr id="34" name="Text 32"/>
+          <p:cNvSpPr/>
+          <p:nvPr/>
+        </p:nvSpPr>
+        <p:spPr>
+          <a:xfrm>
+            <a:off x="406301" y="2414588"/>
+            <a:ext cx="8498026" cy="104775"/>
+          </a:xfrm>
+          <a:prstGeom prst="rect">
+            <a:avLst/>
+          </a:prstGeom>
+          <a:noFill/>
+          <a:ln/>
+        </p:spPr>
+        <p:txBody>
+          <a:bodyPr wrap="square" lIns="0" tIns="0" rIns="0" bIns="0" rtlCol="0" anchor="t"/>
+          <a:lstStyle/>
+          <a:p>
+            <a:pPr algn="l" indent="0" marL="0">
+              <a:buNone/>
+            </a:pPr>
+            <a:r>
+              <a:rPr lang="en-US" sz="800" b="1" dirty="0">
+                <a:solidFill>
+                  <a:srgbClr val="888888"/>
+                </a:solidFill>
+                <a:latin typeface="Times New Roman" pitchFamily="34" charset="0"/>
+                <a:ea typeface="Times New Roman" pitchFamily="34" charset="-122"/>
+                <a:cs typeface="Times New Roman" pitchFamily="34" charset="-120"/>
+              </a:rPr>
+              <a:t>PHASE 3: Execution &amp; Response</a:t>
+            </a:r>
+            <a:endParaRPr lang="en-US" sz="800" dirty="0"/>
+          </a:p>
+        </p:txBody>
+      </p:sp>
+      <p:sp>
+        <p:nvSpPr>
+          <p:cNvPr id="35" name="Text 33"/>
+          <p:cNvSpPr/>
+          <p:nvPr/>
+        </p:nvSpPr>
+        <p:spPr>
+          <a:xfrm>
+            <a:off x="304800" y="2595414"/>
+            <a:ext cx="4749998" cy="603052"/>
           </a:xfrm>
           <a:prstGeom prst="rect">
             <a:avLst/>
@@ -1226,78 +2144,7 @@
           <a:solidFill>
             <a:srgbClr val="F5F5F5"/>
           </a:solidFill>
-          <a:ln w="9525">
-            <a:solidFill>
-              <a:srgbClr val="666666"/>
-            </a:solidFill>
-          </a:ln>
-        </p:spPr>
-        <p:txBody>
-          <a:bodyPr wrap="square" rtlCol="0" anchor="ctr"/>
-          <a:lstStyle/>
-          <a:p>
-            <a:pPr indent="0" marL="0">
-              <a:buNone/>
-            </a:pPr>
-            <a:endParaRPr lang="en-US" dirty="0"/>
-          </a:p>
-        </p:txBody>
-      </p:sp>
-      <p:sp>
-        <p:nvSpPr>
-          <p:cNvPr id="12" name="Text 10"/>
-          <p:cNvSpPr/>
-          <p:nvPr/>
-        </p:nvSpPr>
-        <p:spPr>
-          <a:xfrm>
-            <a:off x="6508403" y="853827"/>
-            <a:ext cx="1123658" cy="161925"/>
-          </a:xfrm>
-          <a:prstGeom prst="rect">
-            <a:avLst/>
-          </a:prstGeom>
-          <a:noFill/>
-          <a:ln/>
-        </p:spPr>
-        <p:txBody>
-          <a:bodyPr wrap="square" lIns="0" tIns="0" rIns="0" bIns="0" rtlCol="0" anchor="t"/>
-          <a:lstStyle/>
-          <a:p>
-            <a:pPr algn="l" indent="0" marL="0">
-              <a:buNone/>
-            </a:pPr>
-            <a:r>
-              <a:rPr lang="en-US" sz="1100" b="1" dirty="0">
-                <a:solidFill>
-                  <a:srgbClr val="333333"/>
-                </a:solidFill>
-                <a:latin typeface="Times New Roman" pitchFamily="34" charset="0"/>
-                <a:ea typeface="Times New Roman" pitchFamily="34" charset="-122"/>
-                <a:cs typeface="Times New Roman" pitchFamily="34" charset="-120"/>
-              </a:rPr>
-              <a:t>LLM API Request</a:t>
-            </a:r>
-            <a:endParaRPr lang="en-US" sz="1100" dirty="0"/>
-          </a:p>
-        </p:txBody>
-      </p:sp>
-      <p:sp>
-        <p:nvSpPr>
-          <p:cNvPr id="13" name="Text 11"/>
-          <p:cNvSpPr/>
-          <p:nvPr/>
-        </p:nvSpPr>
-        <p:spPr>
-          <a:xfrm>
-            <a:off x="381000" y="1177677"/>
-            <a:ext cx="3407420" cy="333375"/>
-          </a:xfrm>
-          <a:prstGeom prst="rect">
-            <a:avLst/>
-          </a:prstGeom>
-          <a:noFill/>
-          <a:ln w="9525">
+          <a:ln w="19050">
             <a:solidFill>
               <a:srgbClr val="333333"/>
             </a:solidFill>
@@ -1316,14 +2163,92 @@
       </p:sp>
       <p:sp>
         <p:nvSpPr>
-          <p:cNvPr id="14" name="Text 12"/>
-          <p:cNvSpPr/>
-          <p:nvPr/>
-        </p:nvSpPr>
-        <p:spPr>
-          <a:xfrm>
-            <a:off x="1771055" y="1263402"/>
-            <a:ext cx="639705" cy="161925"/>
+          <p:cNvPr id="36" name="Text 34"/>
+          <p:cNvSpPr/>
+          <p:nvPr/>
+        </p:nvSpPr>
+        <p:spPr>
+          <a:xfrm>
+            <a:off x="406220" y="2768352"/>
+            <a:ext cx="4547158" cy="152400"/>
+          </a:xfrm>
+          <a:prstGeom prst="rect">
+            <a:avLst/>
+          </a:prstGeom>
+          <a:noFill/>
+          <a:ln/>
+        </p:spPr>
+        <p:txBody>
+          <a:bodyPr wrap="square" lIns="0" tIns="0" rIns="0" bIns="0" rtlCol="0" anchor="t"/>
+          <a:lstStyle/>
+          <a:p>
+            <a:pPr algn="ctr" indent="0" marL="0">
+              <a:buNone/>
+            </a:pPr>
+            <a:r>
+              <a:rPr lang="en-US" sz="1000" b="1" dirty="0">
+                <a:solidFill>
+                  <a:srgbClr val="333333"/>
+                </a:solidFill>
+                <a:latin typeface="Times New Roman" pitchFamily="34" charset="0"/>
+                <a:ea typeface="Times New Roman" pitchFamily="34" charset="-122"/>
+                <a:cs typeface="Times New Roman" pitchFamily="34" charset="-120"/>
+              </a:rPr>
+              <a:t>Request Manager</a:t>
+            </a:r>
+            <a:endParaRPr lang="en-US" sz="1000" dirty="0"/>
+          </a:p>
+        </p:txBody>
+      </p:sp>
+      <p:sp>
+        <p:nvSpPr>
+          <p:cNvPr id="37" name="Text 35"/>
+          <p:cNvSpPr/>
+          <p:nvPr/>
+        </p:nvSpPr>
+        <p:spPr>
+          <a:xfrm>
+            <a:off x="406220" y="2920752"/>
+            <a:ext cx="4547158" cy="104775"/>
+          </a:xfrm>
+          <a:prstGeom prst="rect">
+            <a:avLst/>
+          </a:prstGeom>
+          <a:noFill/>
+          <a:ln/>
+        </p:spPr>
+        <p:txBody>
+          <a:bodyPr wrap="square" lIns="0" tIns="0" rIns="0" bIns="0" rtlCol="0" anchor="t"/>
+          <a:lstStyle/>
+          <a:p>
+            <a:pPr algn="ctr" indent="0" marL="0">
+              <a:buNone/>
+            </a:pPr>
+            <a:r>
+              <a:rPr lang="en-US" sz="750" dirty="0">
+                <a:solidFill>
+                  <a:srgbClr val="666666"/>
+                </a:solidFill>
+                <a:latin typeface="Times New Roman" pitchFamily="34" charset="0"/>
+                <a:ea typeface="Times New Roman" pitchFamily="34" charset="-122"/>
+                <a:cs typeface="Times New Roman" pitchFamily="34" charset="-120"/>
+              </a:rPr>
+              <a:t>Dequeue next request · Forward to LLM backend</a:t>
+            </a:r>
+            <a:endParaRPr lang="en-US" sz="750" dirty="0"/>
+          </a:p>
+        </p:txBody>
+      </p:sp>
+      <p:sp>
+        <p:nvSpPr>
+          <p:cNvPr id="38" name="Text 36"/>
+          <p:cNvSpPr/>
+          <p:nvPr/>
+        </p:nvSpPr>
+        <p:spPr>
+          <a:xfrm>
+            <a:off x="5130998" y="2792164"/>
+            <a:ext cx="181407" cy="209550"/>
           </a:xfrm>
           <a:prstGeom prst="rect">
             <a:avLst/>
@@ -1339,7 +2264,7 @@
               <a:buNone/>
             </a:pPr>
             <a:r>
-              <a:rPr lang="en-US" sz="1100" b="1" dirty="0">
+              <a:rPr lang="en-US" sz="1400" dirty="0">
                 <a:solidFill>
                   <a:srgbClr val="333333"/>
                 </a:solidFill>
@@ -1347,45 +2272,6 @@
                 <a:ea typeface="Times New Roman" pitchFamily="34" charset="-122"/>
                 <a:cs typeface="Times New Roman" pitchFamily="34" charset="-120"/>
               </a:rPr>
-              <a:t>CPU Time</a:t>
-            </a:r>
-            <a:endParaRPr lang="en-US" sz="1100" dirty="0"/>
-          </a:p>
-        </p:txBody>
-      </p:sp>
-      <p:sp>
-        <p:nvSpPr>
-          <p:cNvPr id="15" name="Text 13"/>
-          <p:cNvSpPr/>
-          <p:nvPr/>
-        </p:nvSpPr>
-        <p:spPr>
-          <a:xfrm>
-            <a:off x="4483001" y="1187202"/>
-            <a:ext cx="181407" cy="209550"/>
-          </a:xfrm>
-          <a:prstGeom prst="rect">
-            <a:avLst/>
-          </a:prstGeom>
-          <a:noFill/>
-          <a:ln/>
-        </p:spPr>
-        <p:txBody>
-          <a:bodyPr wrap="square" lIns="0" tIns="0" rIns="0" bIns="0" rtlCol="0" anchor="t"/>
-          <a:lstStyle/>
-          <a:p>
-            <a:pPr algn="l" indent="0" marL="0">
-              <a:buNone/>
-            </a:pPr>
-            <a:r>
-              <a:rPr lang="en-US" sz="1400" dirty="0">
-                <a:solidFill>
-                  <a:srgbClr val="333333"/>
-                </a:solidFill>
-                <a:latin typeface="Times New Roman" pitchFamily="34" charset="0"/>
-                <a:ea typeface="Times New Roman" pitchFamily="34" charset="-122"/>
-                <a:cs typeface="Times New Roman" pitchFamily="34" charset="-120"/>
-              </a:rPr>
               <a:t>→</a:t>
             </a:r>
             <a:endParaRPr lang="en-US" sz="1400" dirty="0"/>
@@ -1394,132 +2280,22 @@
       </p:sp>
       <p:sp>
         <p:nvSpPr>
-          <p:cNvPr id="16" name="Text 14"/>
-          <p:cNvSpPr/>
-          <p:nvPr/>
-        </p:nvSpPr>
-        <p:spPr>
-          <a:xfrm>
-            <a:off x="4214366" y="1396752"/>
-            <a:ext cx="729422" cy="104775"/>
-          </a:xfrm>
-          <a:prstGeom prst="rect">
-            <a:avLst/>
-          </a:prstGeom>
-          <a:noFill/>
-          <a:ln/>
-        </p:spPr>
-        <p:txBody>
-          <a:bodyPr wrap="square" lIns="0" tIns="0" rIns="0" bIns="0" rtlCol="0" anchor="t"/>
-          <a:lstStyle/>
-          <a:p>
-            <a:pPr algn="l" indent="0" marL="0">
-              <a:buNone/>
-            </a:pPr>
-            <a:r>
-              <a:rPr lang="en-US" sz="750" i="1" dirty="0">
-                <a:solidFill>
-                  <a:srgbClr val="888888"/>
-                </a:solidFill>
-                <a:latin typeface="Times New Roman" pitchFamily="34" charset="0"/>
-                <a:ea typeface="Times New Roman" pitchFamily="34" charset="-122"/>
-                <a:cs typeface="Times New Roman" pitchFamily="34" charset="-120"/>
-              </a:rPr>
-              <a:t>Allocated resource</a:t>
-            </a:r>
-            <a:endParaRPr lang="en-US" sz="750" dirty="0"/>
-          </a:p>
-        </p:txBody>
-      </p:sp>
-      <p:sp>
-        <p:nvSpPr>
-          <p:cNvPr id="17" name="Text 15"/>
-          <p:cNvSpPr/>
-          <p:nvPr/>
-        </p:nvSpPr>
-        <p:spPr>
-          <a:xfrm>
-            <a:off x="5355580" y="1177677"/>
-            <a:ext cx="3407420" cy="333375"/>
+          <p:cNvPr id="39" name="Text 37"/>
+          <p:cNvSpPr/>
+          <p:nvPr/>
+        </p:nvSpPr>
+        <p:spPr>
+          <a:xfrm>
+            <a:off x="5385048" y="2595414"/>
+            <a:ext cx="1688902" cy="603052"/>
           </a:xfrm>
           <a:prstGeom prst="rect">
             <a:avLst/>
           </a:prstGeom>
           <a:solidFill>
-            <a:srgbClr val="F5F5F5"/>
+            <a:srgbClr val="333333"/>
           </a:solidFill>
-          <a:ln w="9525">
-            <a:solidFill>
-              <a:srgbClr val="666666"/>
-            </a:solidFill>
-          </a:ln>
-        </p:spPr>
-        <p:txBody>
-          <a:bodyPr wrap="square" rtlCol="0" anchor="ctr"/>
-          <a:lstStyle/>
-          <a:p>
-            <a:pPr indent="0" marL="0">
-              <a:buNone/>
-            </a:pPr>
-            <a:endParaRPr lang="en-US" dirty="0"/>
-          </a:p>
-        </p:txBody>
-      </p:sp>
-      <p:sp>
-        <p:nvSpPr>
-          <p:cNvPr id="18" name="Text 16"/>
-          <p:cNvSpPr/>
-          <p:nvPr/>
-        </p:nvSpPr>
-        <p:spPr>
-          <a:xfrm>
-            <a:off x="6593681" y="1263402"/>
-            <a:ext cx="949690" cy="161925"/>
-          </a:xfrm>
-          <a:prstGeom prst="rect">
-            <a:avLst/>
-          </a:prstGeom>
-          <a:noFill/>
-          <a:ln/>
-        </p:spPr>
-        <p:txBody>
-          <a:bodyPr wrap="square" lIns="0" tIns="0" rIns="0" bIns="0" rtlCol="0" anchor="t"/>
-          <a:lstStyle/>
-          <a:p>
-            <a:pPr algn="l" indent="0" marL="0">
-              <a:buNone/>
-            </a:pPr>
-            <a:r>
-              <a:rPr lang="en-US" sz="1100" b="1" dirty="0">
-                <a:solidFill>
-                  <a:srgbClr val="333333"/>
-                </a:solidFill>
-                <a:latin typeface="Times New Roman" pitchFamily="34" charset="0"/>
-                <a:ea typeface="Times New Roman" pitchFamily="34" charset="-122"/>
-                <a:cs typeface="Times New Roman" pitchFamily="34" charset="-120"/>
-              </a:rPr>
-              <a:t>API Call Quota</a:t>
-            </a:r>
-            <a:endParaRPr lang="en-US" sz="1100" dirty="0"/>
-          </a:p>
-        </p:txBody>
-      </p:sp>
-      <p:sp>
-        <p:nvSpPr>
-          <p:cNvPr id="19" name="Text 17"/>
-          <p:cNvSpPr/>
-          <p:nvPr/>
-        </p:nvSpPr>
-        <p:spPr>
-          <a:xfrm>
-            <a:off x="381000" y="1587252"/>
-            <a:ext cx="3407420" cy="333375"/>
-          </a:xfrm>
-          <a:prstGeom prst="rect">
-            <a:avLst/>
-          </a:prstGeom>
-          <a:noFill/>
-          <a:ln w="9525">
+          <a:ln w="19050">
             <a:solidFill>
               <a:srgbClr val="333333"/>
             </a:solidFill>
@@ -1538,14 +2314,92 @@
       </p:sp>
       <p:sp>
         <p:nvSpPr>
-          <p:cNvPr id="20" name="Text 18"/>
-          <p:cNvSpPr/>
-          <p:nvPr/>
-        </p:nvSpPr>
-        <p:spPr>
-          <a:xfrm>
-            <a:off x="1848148" y="1672977"/>
-            <a:ext cx="482587" cy="161925"/>
+          <p:cNvPr id="40" name="Text 38"/>
+          <p:cNvSpPr/>
+          <p:nvPr/>
+        </p:nvSpPr>
+        <p:spPr>
+          <a:xfrm>
+            <a:off x="5517079" y="2768352"/>
+            <a:ext cx="1424839" cy="152400"/>
+          </a:xfrm>
+          <a:prstGeom prst="rect">
+            <a:avLst/>
+          </a:prstGeom>
+          <a:noFill/>
+          <a:ln/>
+        </p:spPr>
+        <p:txBody>
+          <a:bodyPr wrap="square" lIns="0" tIns="0" rIns="0" bIns="0" rtlCol="0" anchor="t"/>
+          <a:lstStyle/>
+          <a:p>
+            <a:pPr algn="ctr" indent="0" marL="0">
+              <a:buNone/>
+            </a:pPr>
+            <a:r>
+              <a:rPr lang="en-US" sz="1000" b="1" dirty="0">
+                <a:solidFill>
+                  <a:srgbClr val="FFFFFF"/>
+                </a:solidFill>
+                <a:latin typeface="Times New Roman" pitchFamily="34" charset="0"/>
+                <a:ea typeface="Times New Roman" pitchFamily="34" charset="-122"/>
+                <a:cs typeface="Times New Roman" pitchFamily="34" charset="-120"/>
+              </a:rPr>
+              <a:t>Ollama (LLM)</a:t>
+            </a:r>
+            <a:endParaRPr lang="en-US" sz="1000" dirty="0"/>
+          </a:p>
+        </p:txBody>
+      </p:sp>
+      <p:sp>
+        <p:nvSpPr>
+          <p:cNvPr id="41" name="Text 39"/>
+          <p:cNvSpPr/>
+          <p:nvPr/>
+        </p:nvSpPr>
+        <p:spPr>
+          <a:xfrm>
+            <a:off x="5517079" y="2920752"/>
+            <a:ext cx="1424839" cy="104775"/>
+          </a:xfrm>
+          <a:prstGeom prst="rect">
+            <a:avLst/>
+          </a:prstGeom>
+          <a:noFill/>
+          <a:ln/>
+        </p:spPr>
+        <p:txBody>
+          <a:bodyPr wrap="square" lIns="0" tIns="0" rIns="0" bIns="0" rtlCol="0" anchor="t"/>
+          <a:lstStyle/>
+          <a:p>
+            <a:pPr algn="ctr" indent="0" marL="0">
+              <a:buNone/>
+            </a:pPr>
+            <a:r>
+              <a:rPr lang="en-US" sz="750" dirty="0">
+                <a:solidFill>
+                  <a:srgbClr val="CCCCCC"/>
+                </a:solidFill>
+                <a:latin typeface="Times New Roman" pitchFamily="34" charset="0"/>
+                <a:ea typeface="Times New Roman" pitchFamily="34" charset="-122"/>
+                <a:cs typeface="Times New Roman" pitchFamily="34" charset="-120"/>
+              </a:rPr>
+              <a:t>Local inference</a:t>
+            </a:r>
+            <a:endParaRPr lang="en-US" sz="750" dirty="0"/>
+          </a:p>
+        </p:txBody>
+      </p:sp>
+      <p:sp>
+        <p:nvSpPr>
+          <p:cNvPr id="42" name="Text 40"/>
+          <p:cNvSpPr/>
+          <p:nvPr/>
+        </p:nvSpPr>
+        <p:spPr>
+          <a:xfrm>
+            <a:off x="7150150" y="2792164"/>
+            <a:ext cx="181407" cy="209550"/>
           </a:xfrm>
           <a:prstGeom prst="rect">
             <a:avLst/>
@@ -1561,7 +2415,7 @@
               <a:buNone/>
             </a:pPr>
             <a:r>
-              <a:rPr lang="en-US" sz="1100" b="1" dirty="0">
+              <a:rPr lang="en-US" sz="1400" dirty="0">
                 <a:solidFill>
                   <a:srgbClr val="333333"/>
                 </a:solidFill>
@@ -1569,45 +2423,6 @@
                 <a:ea typeface="Times New Roman" pitchFamily="34" charset="-122"/>
                 <a:cs typeface="Times New Roman" pitchFamily="34" charset="-120"/>
               </a:rPr>
-              <a:t>Priority</a:t>
-            </a:r>
-            <a:endParaRPr lang="en-US" sz="1100" dirty="0"/>
-          </a:p>
-        </p:txBody>
-      </p:sp>
-      <p:sp>
-        <p:nvSpPr>
-          <p:cNvPr id="21" name="Text 19"/>
-          <p:cNvSpPr/>
-          <p:nvPr/>
-        </p:nvSpPr>
-        <p:spPr>
-          <a:xfrm>
-            <a:off x="4483001" y="1596777"/>
-            <a:ext cx="181407" cy="209550"/>
-          </a:xfrm>
-          <a:prstGeom prst="rect">
-            <a:avLst/>
-          </a:prstGeom>
-          <a:noFill/>
-          <a:ln/>
-        </p:spPr>
-        <p:txBody>
-          <a:bodyPr wrap="square" lIns="0" tIns="0" rIns="0" bIns="0" rtlCol="0" anchor="t"/>
-          <a:lstStyle/>
-          <a:p>
-            <a:pPr algn="l" indent="0" marL="0">
-              <a:buNone/>
-            </a:pPr>
-            <a:r>
-              <a:rPr lang="en-US" sz="1400" dirty="0">
-                <a:solidFill>
-                  <a:srgbClr val="333333"/>
-                </a:solidFill>
-                <a:latin typeface="Times New Roman" pitchFamily="34" charset="0"/>
-                <a:ea typeface="Times New Roman" pitchFamily="34" charset="-122"/>
-                <a:cs typeface="Times New Roman" pitchFamily="34" charset="-120"/>
-              </a:rPr>
               <a:t>→</a:t>
             </a:r>
             <a:endParaRPr lang="en-US" sz="1400" dirty="0"/>
@@ -1616,53 +2431,14 @@
       </p:sp>
       <p:sp>
         <p:nvSpPr>
-          <p:cNvPr id="22" name="Text 20"/>
-          <p:cNvSpPr/>
-          <p:nvPr/>
-        </p:nvSpPr>
-        <p:spPr>
-          <a:xfrm>
-            <a:off x="4217789" y="1806327"/>
-            <a:ext cx="722439" cy="104775"/>
-          </a:xfrm>
-          <a:prstGeom prst="rect">
-            <a:avLst/>
-          </a:prstGeom>
-          <a:noFill/>
-          <a:ln/>
-        </p:spPr>
-        <p:txBody>
-          <a:bodyPr wrap="square" lIns="0" tIns="0" rIns="0" bIns="0" rtlCol="0" anchor="t"/>
-          <a:lstStyle/>
-          <a:p>
-            <a:pPr algn="l" indent="0" marL="0">
-              <a:buNone/>
-            </a:pPr>
-            <a:r>
-              <a:rPr lang="en-US" sz="750" i="1" dirty="0">
-                <a:solidFill>
-                  <a:srgbClr val="888888"/>
-                </a:solidFill>
-                <a:latin typeface="Times New Roman" pitchFamily="34" charset="0"/>
-                <a:ea typeface="Times New Roman" pitchFamily="34" charset="-122"/>
-                <a:cs typeface="Times New Roman" pitchFamily="34" charset="-120"/>
-              </a:rPr>
-              <a:t>Ordering criterion</a:t>
-            </a:r>
-            <a:endParaRPr lang="en-US" sz="750" dirty="0"/>
-          </a:p>
-        </p:txBody>
-      </p:sp>
-      <p:sp>
-        <p:nvSpPr>
-          <p:cNvPr id="23" name="Text 21"/>
-          <p:cNvSpPr/>
-          <p:nvPr/>
-        </p:nvSpPr>
-        <p:spPr>
-          <a:xfrm>
-            <a:off x="5355580" y="1587252"/>
-            <a:ext cx="3407420" cy="333375"/>
+          <p:cNvPr id="43" name="Text 41"/>
+          <p:cNvSpPr/>
+          <p:nvPr/>
+        </p:nvSpPr>
+        <p:spPr>
+          <a:xfrm>
+            <a:off x="7404199" y="2595414"/>
+            <a:ext cx="1435001" cy="603052"/>
           </a:xfrm>
           <a:prstGeom prst="rect">
             <a:avLst/>
@@ -1670,78 +2446,7 @@
           <a:solidFill>
             <a:srgbClr val="F5F5F5"/>
           </a:solidFill>
-          <a:ln w="9525">
-            <a:solidFill>
-              <a:srgbClr val="666666"/>
-            </a:solidFill>
-          </a:ln>
-        </p:spPr>
-        <p:txBody>
-          <a:bodyPr wrap="square" rtlCol="0" anchor="ctr"/>
-          <a:lstStyle/>
-          <a:p>
-            <a:pPr indent="0" marL="0">
-              <a:buNone/>
-            </a:pPr>
-            <a:endParaRPr lang="en-US" dirty="0"/>
-          </a:p>
-        </p:txBody>
-      </p:sp>
-      <p:sp>
-        <p:nvSpPr>
-          <p:cNvPr id="24" name="Text 22"/>
-          <p:cNvSpPr/>
-          <p:nvPr/>
-        </p:nvSpPr>
-        <p:spPr>
-          <a:xfrm>
-            <a:off x="6338441" y="1672977"/>
-            <a:ext cx="1470532" cy="161925"/>
-          </a:xfrm>
-          <a:prstGeom prst="rect">
-            <a:avLst/>
-          </a:prstGeom>
-          <a:noFill/>
-          <a:ln/>
-        </p:spPr>
-        <p:txBody>
-          <a:bodyPr wrap="square" lIns="0" tIns="0" rIns="0" bIns="0" rtlCol="0" anchor="t"/>
-          <a:lstStyle/>
-          <a:p>
-            <a:pPr algn="l" indent="0" marL="0">
-              <a:buNone/>
-            </a:pPr>
-            <a:r>
-              <a:rPr lang="en-US" sz="1100" b="1" dirty="0">
-                <a:solidFill>
-                  <a:srgbClr val="333333"/>
-                </a:solidFill>
-                <a:latin typeface="Times New Roman" pitchFamily="34" charset="0"/>
-                <a:ea typeface="Times New Roman" pitchFamily="34" charset="-122"/>
-                <a:cs typeface="Times New Roman" pitchFamily="34" charset="-120"/>
-              </a:rPr>
-              <a:t>Tenant Grade / Urgency</a:t>
-            </a:r>
-            <a:endParaRPr lang="en-US" sz="1100" dirty="0"/>
-          </a:p>
-        </p:txBody>
-      </p:sp>
-      <p:sp>
-        <p:nvSpPr>
-          <p:cNvPr id="25" name="Text 23"/>
-          <p:cNvSpPr/>
-          <p:nvPr/>
-        </p:nvSpPr>
-        <p:spPr>
-          <a:xfrm>
-            <a:off x="381000" y="1996827"/>
-            <a:ext cx="3407420" cy="333375"/>
-          </a:xfrm>
-          <a:prstGeom prst="rect">
-            <a:avLst/>
-          </a:prstGeom>
-          <a:noFill/>
-          <a:ln w="9525">
+          <a:ln w="19050">
             <a:solidFill>
               <a:srgbClr val="333333"/>
             </a:solidFill>
@@ -1760,30 +2465,30 @@
       </p:sp>
       <p:sp>
         <p:nvSpPr>
-          <p:cNvPr id="26" name="Text 24"/>
-          <p:cNvSpPr/>
-          <p:nvPr/>
-        </p:nvSpPr>
-        <p:spPr>
-          <a:xfrm>
-            <a:off x="1430982" y="2082552"/>
-            <a:ext cx="1333604" cy="161925"/>
-          </a:xfrm>
-          <a:prstGeom prst="rect">
-            <a:avLst/>
-          </a:prstGeom>
-          <a:noFill/>
-          <a:ln/>
-        </p:spPr>
-        <p:txBody>
-          <a:bodyPr wrap="square" lIns="0" tIns="0" rIns="0" bIns="0" rtlCol="0" anchor="t"/>
-          <a:lstStyle/>
-          <a:p>
-            <a:pPr algn="l" indent="0" marL="0">
-              <a:buNone/>
-            </a:pPr>
-            <a:r>
-              <a:rPr lang="en-US" sz="1100" b="1" dirty="0">
+          <p:cNvPr id="44" name="Text 42"/>
+          <p:cNvSpPr/>
+          <p:nvPr/>
+        </p:nvSpPr>
+        <p:spPr>
+          <a:xfrm>
+            <a:off x="7538770" y="2715964"/>
+            <a:ext cx="1165860" cy="152400"/>
+          </a:xfrm>
+          <a:prstGeom prst="rect">
+            <a:avLst/>
+          </a:prstGeom>
+          <a:noFill/>
+          <a:ln/>
+        </p:spPr>
+        <p:txBody>
+          <a:bodyPr wrap="square" lIns="0" tIns="0" rIns="0" bIns="0" rtlCol="0" anchor="t"/>
+          <a:lstStyle/>
+          <a:p>
+            <a:pPr algn="ctr" indent="0" marL="0">
+              <a:buNone/>
+            </a:pPr>
+            <a:r>
+              <a:rPr lang="en-US" sz="1000" b="1" dirty="0">
                 <a:solidFill>
                   <a:srgbClr val="333333"/>
                 </a:solidFill>
@@ -1791,85 +2496,46 @@
                 <a:ea typeface="Times New Roman" pitchFamily="34" charset="-122"/>
                 <a:cs typeface="Times New Roman" pitchFamily="34" charset="-120"/>
               </a:rPr>
-              <a:t>Scheduling Algorithm</a:t>
-            </a:r>
-            <a:endParaRPr lang="en-US" sz="1100" dirty="0"/>
-          </a:p>
-        </p:txBody>
-      </p:sp>
-      <p:sp>
-        <p:nvSpPr>
-          <p:cNvPr id="27" name="Text 25"/>
-          <p:cNvSpPr/>
-          <p:nvPr/>
-        </p:nvSpPr>
-        <p:spPr>
-          <a:xfrm>
-            <a:off x="4483001" y="2006352"/>
-            <a:ext cx="181407" cy="209550"/>
-          </a:xfrm>
-          <a:prstGeom prst="rect">
-            <a:avLst/>
-          </a:prstGeom>
-          <a:noFill/>
-          <a:ln/>
-        </p:spPr>
-        <p:txBody>
-          <a:bodyPr wrap="square" lIns="0" tIns="0" rIns="0" bIns="0" rtlCol="0" anchor="t"/>
-          <a:lstStyle/>
-          <a:p>
-            <a:pPr algn="l" indent="0" marL="0">
-              <a:buNone/>
-            </a:pPr>
-            <a:r>
-              <a:rPr lang="en-US" sz="1400" dirty="0">
-                <a:solidFill>
-                  <a:srgbClr val="333333"/>
-                </a:solidFill>
-                <a:latin typeface="Times New Roman" pitchFamily="34" charset="0"/>
-                <a:ea typeface="Times New Roman" pitchFamily="34" charset="-122"/>
-                <a:cs typeface="Times New Roman" pitchFamily="34" charset="-120"/>
-              </a:rPr>
-              <a:t>→</a:t>
-            </a:r>
-            <a:endParaRPr lang="en-US" sz="1400" dirty="0"/>
-          </a:p>
-        </p:txBody>
-      </p:sp>
-      <p:sp>
-        <p:nvSpPr>
-          <p:cNvPr id="28" name="Text 26"/>
-          <p:cNvSpPr/>
-          <p:nvPr/>
-        </p:nvSpPr>
-        <p:spPr>
-          <a:xfrm>
-            <a:off x="4271665" y="2215902"/>
-            <a:ext cx="612532" cy="104775"/>
-          </a:xfrm>
-          <a:prstGeom prst="rect">
-            <a:avLst/>
-          </a:prstGeom>
-          <a:noFill/>
-          <a:ln/>
-        </p:spPr>
-        <p:txBody>
-          <a:bodyPr wrap="square" lIns="0" tIns="0" rIns="0" bIns="0" rtlCol="0" anchor="t"/>
-          <a:lstStyle/>
-          <a:p>
-            <a:pPr algn="l" indent="0" marL="0">
-              <a:buNone/>
-            </a:pPr>
-            <a:r>
-              <a:rPr lang="en-US" sz="750" i="1" dirty="0">
-                <a:solidFill>
-                  <a:srgbClr val="888888"/>
-                </a:solidFill>
-                <a:latin typeface="Times New Roman" pitchFamily="34" charset="0"/>
-                <a:ea typeface="Times New Roman" pitchFamily="34" charset="-122"/>
-                <a:cs typeface="Times New Roman" pitchFamily="34" charset="-120"/>
-              </a:rPr>
-              <a:t>Dispatch policy</a:t>
+              <a:t>Response</a:t>
+            </a:r>
+            <a:endParaRPr lang="en-US" sz="1000" dirty="0"/>
+          </a:p>
+        </p:txBody>
+      </p:sp>
+      <p:sp>
+        <p:nvSpPr>
+          <p:cNvPr id="45" name="Text 43"/>
+          <p:cNvSpPr/>
+          <p:nvPr/>
+        </p:nvSpPr>
+        <p:spPr>
+          <a:xfrm>
+            <a:off x="7538770" y="2868364"/>
+            <a:ext cx="1165860" cy="104775"/>
+          </a:xfrm>
+          <a:prstGeom prst="rect">
+            <a:avLst/>
+          </a:prstGeom>
+          <a:noFill/>
+          <a:ln/>
+        </p:spPr>
+        <p:txBody>
+          <a:bodyPr wrap="square" lIns="0" tIns="0" rIns="0" bIns="0" rtlCol="0" anchor="t"/>
+          <a:lstStyle/>
+          <a:p>
+            <a:pPr algn="ctr" indent="0" marL="0">
+              <a:buNone/>
+            </a:pPr>
+            <a:r>
+              <a:rPr lang="en-US" sz="750" dirty="0">
+                <a:solidFill>
+                  <a:srgbClr val="666666"/>
+                </a:solidFill>
+                <a:latin typeface="Times New Roman" pitchFamily="34" charset="0"/>
+                <a:ea typeface="Times New Roman" pitchFamily="34" charset="-122"/>
+                <a:cs typeface="Times New Roman" pitchFamily="34" charset="-120"/>
+              </a:rPr>
+              <a:t>Wait time logged</a:t>
             </a:r>
             <a:endParaRPr lang="en-US" sz="750" dirty="0"/>
           </a:p>
@@ -1877,24 +2543,61 @@
       </p:sp>
       <p:sp>
         <p:nvSpPr>
-          <p:cNvPr id="29" name="Text 27"/>
-          <p:cNvSpPr/>
-          <p:nvPr/>
-        </p:nvSpPr>
-        <p:spPr>
-          <a:xfrm>
-            <a:off x="5355580" y="1996827"/>
-            <a:ext cx="3407420" cy="333375"/>
-          </a:xfrm>
-          <a:prstGeom prst="rect">
-            <a:avLst/>
-          </a:prstGeom>
-          <a:solidFill>
-            <a:srgbClr val="F5F5F5"/>
-          </a:solidFill>
+          <p:cNvPr id="46" name="Text 44"/>
+          <p:cNvSpPr/>
+          <p:nvPr/>
+        </p:nvSpPr>
+        <p:spPr>
+          <a:xfrm>
+            <a:off x="7538770" y="2973139"/>
+            <a:ext cx="1165860" cy="104775"/>
+          </a:xfrm>
+          <a:prstGeom prst="rect">
+            <a:avLst/>
+          </a:prstGeom>
+          <a:noFill/>
+          <a:ln/>
+        </p:spPr>
+        <p:txBody>
+          <a:bodyPr wrap="square" lIns="0" tIns="0" rIns="0" bIns="0" rtlCol="0" anchor="t"/>
+          <a:lstStyle/>
+          <a:p>
+            <a:pPr algn="ctr" indent="0" marL="0">
+              <a:buNone/>
+            </a:pPr>
+            <a:r>
+              <a:rPr lang="en-US" sz="750" dirty="0">
+                <a:solidFill>
+                  <a:srgbClr val="666666"/>
+                </a:solidFill>
+                <a:latin typeface="Times New Roman" pitchFamily="34" charset="0"/>
+                <a:ea typeface="Times New Roman" pitchFamily="34" charset="-122"/>
+                <a:cs typeface="Times New Roman" pitchFamily="34" charset="-120"/>
+              </a:rPr>
+              <a:t>JFI calculated</a:t>
+            </a:r>
+            <a:endParaRPr lang="en-US" sz="750" dirty="0"/>
+          </a:p>
+        </p:txBody>
+      </p:sp>
+      <p:sp>
+        <p:nvSpPr>
+          <p:cNvPr id="47" name="Text 45"/>
+          <p:cNvSpPr/>
+          <p:nvPr/>
+        </p:nvSpPr>
+        <p:spPr>
+          <a:xfrm>
+            <a:off x="304800" y="3299966"/>
+            <a:ext cx="2777133" cy="441127"/>
+          </a:xfrm>
+          <a:prstGeom prst="rect">
+            <a:avLst/>
+          </a:prstGeom>
+          <a:noFill/>
           <a:ln w="9525">
             <a:solidFill>
-              <a:srgbClr val="666666"/>
+              <a:srgbClr val="CCCCCC"/>
             </a:solidFill>
           </a:ln>
         </p:spPr>
@@ -1911,14 +2614,14 @@
       </p:sp>
       <p:sp>
         <p:nvSpPr>
-          <p:cNvPr id="30" name="Text 28"/>
-          <p:cNvSpPr/>
-          <p:nvPr/>
-        </p:nvSpPr>
-        <p:spPr>
-          <a:xfrm>
-            <a:off x="6280993" y="2082552"/>
-            <a:ext cx="1587725" cy="161925"/>
+          <p:cNvPr id="48" name="Text 46"/>
+          <p:cNvSpPr/>
+          <p:nvPr/>
+        </p:nvSpPr>
+        <p:spPr>
+          <a:xfrm>
+            <a:off x="415826" y="3372892"/>
+            <a:ext cx="2606183" cy="104775"/>
           </a:xfrm>
           <a:prstGeom prst="rect">
             <a:avLst/>
@@ -1934,7 +2637,7 @@
               <a:buNone/>
             </a:pPr>
             <a:r>
-              <a:rPr lang="en-US" sz="1100" b="1" dirty="0">
+              <a:rPr lang="en-US" sz="800" b="1" dirty="0">
                 <a:solidFill>
                   <a:srgbClr val="333333"/>
                 </a:solidFill>
@@ -1942,22 +2645,100 @@
                 <a:ea typeface="Times New Roman" pitchFamily="34" charset="-122"/>
                 <a:cs typeface="Times New Roman" pitchFamily="34" charset="-120"/>
               </a:rPr>
-              <a:t>Request Processing Order</a:t>
-            </a:r>
-            <a:endParaRPr lang="en-US" sz="1100" dirty="0"/>
-          </a:p>
-        </p:txBody>
-      </p:sp>
-      <p:sp>
-        <p:nvSpPr>
-          <p:cNvPr id="31" name="Text 29"/>
-          <p:cNvSpPr/>
-          <p:nvPr/>
-        </p:nvSpPr>
-        <p:spPr>
-          <a:xfrm>
-            <a:off x="381000" y="2406402"/>
-            <a:ext cx="3407420" cy="333375"/>
+              <a:t>Starvation Prevention</a:t>
+            </a:r>
+            <a:endParaRPr lang="en-US" sz="800" dirty="0"/>
+          </a:p>
+        </p:txBody>
+      </p:sp>
+      <p:sp>
+        <p:nvSpPr>
+          <p:cNvPr id="49" name="Text 47"/>
+          <p:cNvSpPr/>
+          <p:nvPr/>
+        </p:nvSpPr>
+        <p:spPr>
+          <a:xfrm>
+            <a:off x="415826" y="3477667"/>
+            <a:ext cx="2606183" cy="95250"/>
+          </a:xfrm>
+          <a:prstGeom prst="rect">
+            <a:avLst/>
+          </a:prstGeom>
+          <a:noFill/>
+          <a:ln/>
+        </p:spPr>
+        <p:txBody>
+          <a:bodyPr wrap="square" lIns="0" tIns="0" rIns="0" bIns="0" rtlCol="0" anchor="t"/>
+          <a:lstStyle/>
+          <a:p>
+            <a:pPr algn="l" indent="0" marL="0">
+              <a:buNone/>
+            </a:pPr>
+            <a:r>
+              <a:rPr lang="en-US" sz="700" dirty="0">
+                <a:solidFill>
+                  <a:srgbClr val="666666"/>
+                </a:solidFill>
+                <a:latin typeface="Times New Roman" pitchFamily="34" charset="0"/>
+                <a:ea typeface="Times New Roman" pitchFamily="34" charset="-122"/>
+                <a:cs typeface="Times New Roman" pitchFamily="34" charset="-120"/>
+              </a:rPr>
+              <a:t>Priority: Aging (auto-promote)</a:t>
+            </a:r>
+            <a:endParaRPr lang="en-US" sz="700" dirty="0"/>
+          </a:p>
+        </p:txBody>
+      </p:sp>
+      <p:sp>
+        <p:nvSpPr>
+          <p:cNvPr id="50" name="Text 48"/>
+          <p:cNvSpPr/>
+          <p:nvPr/>
+        </p:nvSpPr>
+        <p:spPr>
+          <a:xfrm>
+            <a:off x="415826" y="3572917"/>
+            <a:ext cx="2606183" cy="95250"/>
+          </a:xfrm>
+          <a:prstGeom prst="rect">
+            <a:avLst/>
+          </a:prstGeom>
+          <a:noFill/>
+          <a:ln/>
+        </p:spPr>
+        <p:txBody>
+          <a:bodyPr wrap="square" lIns="0" tIns="0" rIns="0" bIns="0" rtlCol="0" anchor="t"/>
+          <a:lstStyle/>
+          <a:p>
+            <a:pPr algn="l" indent="0" marL="0">
+              <a:buNone/>
+            </a:pPr>
+            <a:r>
+              <a:rPr lang="en-US" sz="700" dirty="0">
+                <a:solidFill>
+                  <a:srgbClr val="666666"/>
+                </a:solidFill>
+                <a:latin typeface="Times New Roman" pitchFamily="34" charset="0"/>
+                <a:ea typeface="Times New Roman" pitchFamily="34" charset="-122"/>
+                <a:cs typeface="Times New Roman" pitchFamily="34" charset="-120"/>
+              </a:rPr>
+              <a:t>MLFQ: Periodic Boost (all → Q0)</a:t>
+            </a:r>
+            <a:endParaRPr lang="en-US" sz="700" dirty="0"/>
+          </a:p>
+        </p:txBody>
+      </p:sp>
+      <p:sp>
+        <p:nvSpPr>
+          <p:cNvPr id="51" name="Text 49"/>
+          <p:cNvSpPr/>
+          <p:nvPr/>
+        </p:nvSpPr>
+        <p:spPr>
+          <a:xfrm>
+            <a:off x="3183434" y="3299966"/>
+            <a:ext cx="2777133" cy="441127"/>
           </a:xfrm>
           <a:prstGeom prst="rect">
             <a:avLst/>
@@ -1965,7 +2746,7 @@
           <a:noFill/>
           <a:ln w="9525">
             <a:solidFill>
-              <a:srgbClr val="333333"/>
+              <a:srgbClr val="CCCCCC"/>
             </a:solidFill>
           </a:ln>
         </p:spPr>
@@ -1982,14 +2763,14 @@
       </p:sp>
       <p:sp>
         <p:nvSpPr>
-          <p:cNvPr id="32" name="Text 30"/>
-          <p:cNvSpPr/>
-          <p:nvPr/>
-        </p:nvSpPr>
-        <p:spPr>
-          <a:xfrm>
-            <a:off x="1736973" y="2492127"/>
-            <a:ext cx="709383" cy="161925"/>
+          <p:cNvPr id="52" name="Text 50"/>
+          <p:cNvSpPr/>
+          <p:nvPr/>
+        </p:nvSpPr>
+        <p:spPr>
+          <a:xfrm>
+            <a:off x="3294459" y="3372892"/>
+            <a:ext cx="2606183" cy="104775"/>
           </a:xfrm>
           <a:prstGeom prst="rect">
             <a:avLst/>
@@ -2005,7 +2786,7 @@
               <a:buNone/>
             </a:pPr>
             <a:r>
-              <a:rPr lang="en-US" sz="1100" b="1" dirty="0">
+              <a:rPr lang="en-US" sz="800" b="1" dirty="0">
                 <a:solidFill>
                   <a:srgbClr val="333333"/>
                 </a:solidFill>
@@ -2013,22 +2794,22 @@
                 <a:ea typeface="Times New Roman" pitchFamily="34" charset="-122"/>
                 <a:cs typeface="Times New Roman" pitchFamily="34" charset="-120"/>
               </a:rPr>
-              <a:t>Preemption</a:t>
-            </a:r>
-            <a:endParaRPr lang="en-US" sz="1100" dirty="0"/>
-          </a:p>
-        </p:txBody>
-      </p:sp>
-      <p:sp>
-        <p:nvSpPr>
-          <p:cNvPr id="33" name="Text 31"/>
-          <p:cNvSpPr/>
-          <p:nvPr/>
-        </p:nvSpPr>
-        <p:spPr>
-          <a:xfrm>
-            <a:off x="4483001" y="2415927"/>
-            <a:ext cx="181407" cy="209550"/>
+              <a:t>MLFQ Preemption</a:t>
+            </a:r>
+            <a:endParaRPr lang="en-US" sz="800" dirty="0"/>
+          </a:p>
+        </p:txBody>
+      </p:sp>
+      <p:sp>
+        <p:nvSpPr>
+          <p:cNvPr id="53" name="Text 51"/>
+          <p:cNvSpPr/>
+          <p:nvPr/>
+        </p:nvSpPr>
+        <p:spPr>
+          <a:xfrm>
+            <a:off x="3294459" y="3477667"/>
+            <a:ext cx="2606183" cy="95250"/>
           </a:xfrm>
           <a:prstGeom prst="rect">
             <a:avLst/>
@@ -2044,30 +2825,30 @@
               <a:buNone/>
             </a:pPr>
             <a:r>
-              <a:rPr lang="en-US" sz="1400" dirty="0">
-                <a:solidFill>
-                  <a:srgbClr val="333333"/>
-                </a:solidFill>
-                <a:latin typeface="Times New Roman" pitchFamily="34" charset="0"/>
-                <a:ea typeface="Times New Roman" pitchFamily="34" charset="-122"/>
-                <a:cs typeface="Times New Roman" pitchFamily="34" charset="-120"/>
-              </a:rPr>
-              <a:t>→</a:t>
-            </a:r>
-            <a:endParaRPr lang="en-US" sz="1400" dirty="0"/>
-          </a:p>
-        </p:txBody>
-      </p:sp>
-      <p:sp>
-        <p:nvSpPr>
-          <p:cNvPr id="34" name="Text 32"/>
-          <p:cNvSpPr/>
-          <p:nvPr/>
-        </p:nvSpPr>
-        <p:spPr>
-          <a:xfrm>
-            <a:off x="4199334" y="2625477"/>
-            <a:ext cx="760238" cy="104775"/>
+              <a:rPr lang="en-US" sz="700" dirty="0">
+                <a:solidFill>
+                  <a:srgbClr val="666666"/>
+                </a:solidFill>
+                <a:latin typeface="Times New Roman" pitchFamily="34" charset="0"/>
+                <a:ea typeface="Times New Roman" pitchFamily="34" charset="-122"/>
+                <a:cs typeface="Times New Roman" pitchFamily="34" charset="-120"/>
+              </a:rPr>
+              <a:t>Time slice: 500ms check interval</a:t>
+            </a:r>
+            <a:endParaRPr lang="en-US" sz="700" dirty="0"/>
+          </a:p>
+        </p:txBody>
+      </p:sp>
+      <p:sp>
+        <p:nvSpPr>
+          <p:cNvPr id="54" name="Text 52"/>
+          <p:cNvSpPr/>
+          <p:nvPr/>
+        </p:nvSpPr>
+        <p:spPr>
+          <a:xfrm>
+            <a:off x="3294459" y="3572917"/>
+            <a:ext cx="2606183" cy="95250"/>
           </a:xfrm>
           <a:prstGeom prst="rect">
             <a:avLst/>
@@ -2083,40 +2864,38 @@
               <a:buNone/>
             </a:pPr>
             <a:r>
-              <a:rPr lang="en-US" sz="750" i="1" dirty="0">
-                <a:solidFill>
-                  <a:srgbClr val="888888"/>
-                </a:solidFill>
-                <a:latin typeface="Times New Roman" pitchFamily="34" charset="0"/>
-                <a:ea typeface="Times New Roman" pitchFamily="34" charset="-122"/>
-                <a:cs typeface="Times New Roman" pitchFamily="34" charset="-120"/>
-              </a:rPr>
-              <a:t>Control mechanism</a:t>
-            </a:r>
-            <a:endParaRPr lang="en-US" sz="750" dirty="0"/>
-          </a:p>
-        </p:txBody>
-      </p:sp>
-      <p:sp>
-        <p:nvSpPr>
-          <p:cNvPr id="35" name="Text 33"/>
-          <p:cNvSpPr/>
-          <p:nvPr/>
-        </p:nvSpPr>
-        <p:spPr>
-          <a:xfrm>
-            <a:off x="5355580" y="2406402"/>
-            <a:ext cx="3407420" cy="333375"/>
-          </a:xfrm>
-          <a:prstGeom prst="rect">
-            <a:avLst/>
-          </a:prstGeom>
-          <a:solidFill>
-            <a:srgbClr val="F5F5F5"/>
-          </a:solidFill>
+              <a:rPr lang="en-US" sz="700" dirty="0">
+                <a:solidFill>
+                  <a:srgbClr val="666666"/>
+                </a:solidFill>
+                <a:latin typeface="Times New Roman" pitchFamily="34" charset="0"/>
+                <a:ea typeface="Times New Roman" pitchFamily="34" charset="-122"/>
+                <a:cs typeface="Times New Roman" pitchFamily="34" charset="-120"/>
+              </a:rPr>
+              <a:t>Exceeds quantum → demote to lower queue</a:t>
+            </a:r>
+            <a:endParaRPr lang="en-US" sz="700" dirty="0"/>
+          </a:p>
+        </p:txBody>
+      </p:sp>
+      <p:sp>
+        <p:nvSpPr>
+          <p:cNvPr id="55" name="Text 53"/>
+          <p:cNvSpPr/>
+          <p:nvPr/>
+        </p:nvSpPr>
+        <p:spPr>
+          <a:xfrm>
+            <a:off x="6062067" y="3299966"/>
+            <a:ext cx="2777133" cy="441127"/>
+          </a:xfrm>
+          <a:prstGeom prst="rect">
+            <a:avLst/>
+          </a:prstGeom>
+          <a:noFill/>
           <a:ln w="9525">
             <a:solidFill>
-              <a:srgbClr val="666666"/>
+              <a:srgbClr val="CCCCCC"/>
             </a:solidFill>
           </a:ln>
         </p:spPr>
@@ -2133,14 +2912,14 @@
       </p:sp>
       <p:sp>
         <p:nvSpPr>
-          <p:cNvPr id="36" name="Text 34"/>
-          <p:cNvSpPr/>
-          <p:nvPr/>
-        </p:nvSpPr>
-        <p:spPr>
-          <a:xfrm>
-            <a:off x="6035129" y="2492127"/>
-            <a:ext cx="2089288" cy="161925"/>
+          <p:cNvPr id="56" name="Text 54"/>
+          <p:cNvSpPr/>
+          <p:nvPr/>
+        </p:nvSpPr>
+        <p:spPr>
+          <a:xfrm>
+            <a:off x="6173093" y="3372892"/>
+            <a:ext cx="2606183" cy="104775"/>
           </a:xfrm>
           <a:prstGeom prst="rect">
             <a:avLst/>
@@ -2156,7 +2935,7 @@
               <a:buNone/>
             </a:pPr>
             <a:r>
-              <a:rPr lang="en-US" sz="1100" b="1" dirty="0">
+              <a:rPr lang="en-US" sz="800" b="1" dirty="0">
                 <a:solidFill>
                   <a:srgbClr val="333333"/>
                 </a:solidFill>
@@ -2164,22 +2943,100 @@
                 <a:ea typeface="Times New Roman" pitchFamily="34" charset="-122"/>
                 <a:cs typeface="Times New Roman" pitchFamily="34" charset="-120"/>
               </a:rPr>
-              <a:t>Request Suspension / Queue Move</a:t>
-            </a:r>
-            <a:endParaRPr lang="en-US" sz="1100" dirty="0"/>
-          </a:p>
-        </p:txBody>
-      </p:sp>
-      <p:sp>
-        <p:nvSpPr>
-          <p:cNvPr id="37" name="Shape 35"/>
-          <p:cNvSpPr/>
-          <p:nvPr/>
-        </p:nvSpPr>
-        <p:spPr>
-          <a:xfrm>
-            <a:off x="381000" y="4856262"/>
-            <a:ext cx="8382000" cy="0"/>
+              <a:t>Dual-Level Fairness</a:t>
+            </a:r>
+            <a:endParaRPr lang="en-US" sz="800" dirty="0"/>
+          </a:p>
+        </p:txBody>
+      </p:sp>
+      <p:sp>
+        <p:nvSpPr>
+          <p:cNvPr id="57" name="Text 55"/>
+          <p:cNvSpPr/>
+          <p:nvPr/>
+        </p:nvSpPr>
+        <p:spPr>
+          <a:xfrm>
+            <a:off x="6173093" y="3477667"/>
+            <a:ext cx="2606183" cy="95250"/>
+          </a:xfrm>
+          <a:prstGeom prst="rect">
+            <a:avLst/>
+          </a:prstGeom>
+          <a:noFill/>
+          <a:ln/>
+        </p:spPr>
+        <p:txBody>
+          <a:bodyPr wrap="square" lIns="0" tIns="0" rIns="0" bIns="0" rtlCol="0" anchor="t"/>
+          <a:lstStyle/>
+          <a:p>
+            <a:pPr algn="l" indent="0" marL="0">
+              <a:buNone/>
+            </a:pPr>
+            <a:r>
+              <a:rPr lang="en-US" sz="700" dirty="0">
+                <a:solidFill>
+                  <a:srgbClr val="666666"/>
+                </a:solidFill>
+                <a:latin typeface="Times New Roman" pitchFamily="34" charset="0"/>
+                <a:ea typeface="Times New Roman" pitchFamily="34" charset="-122"/>
+                <a:cs typeface="Times New Roman" pitchFamily="34" charset="-120"/>
+              </a:rPr>
+              <a:t>System JFI: across all tenants</a:t>
+            </a:r>
+            <a:endParaRPr lang="en-US" sz="700" dirty="0"/>
+          </a:p>
+        </p:txBody>
+      </p:sp>
+      <p:sp>
+        <p:nvSpPr>
+          <p:cNvPr id="58" name="Text 56"/>
+          <p:cNvSpPr/>
+          <p:nvPr/>
+        </p:nvSpPr>
+        <p:spPr>
+          <a:xfrm>
+            <a:off x="6173093" y="3572917"/>
+            <a:ext cx="2606183" cy="95250"/>
+          </a:xfrm>
+          <a:prstGeom prst="rect">
+            <a:avLst/>
+          </a:prstGeom>
+          <a:noFill/>
+          <a:ln/>
+        </p:spPr>
+        <p:txBody>
+          <a:bodyPr wrap="square" lIns="0" tIns="0" rIns="0" bIns="0" rtlCol="0" anchor="t"/>
+          <a:lstStyle/>
+          <a:p>
+            <a:pPr algn="l" indent="0" marL="0">
+              <a:buNone/>
+            </a:pPr>
+            <a:r>
+              <a:rPr lang="en-US" sz="700" dirty="0">
+                <a:solidFill>
+                  <a:srgbClr val="666666"/>
+                </a:solidFill>
+                <a:latin typeface="Times New Roman" pitchFamily="34" charset="0"/>
+                <a:ea typeface="Times New Roman" pitchFamily="34" charset="-122"/>
+                <a:cs typeface="Times New Roman" pitchFamily="34" charset="-120"/>
+              </a:rPr>
+              <a:t>Tenant JFI: within same tier (0.92~0.98)</a:t>
+            </a:r>
+            <a:endParaRPr lang="en-US" sz="700" dirty="0"/>
+          </a:p>
+        </p:txBody>
+      </p:sp>
+      <p:sp>
+        <p:nvSpPr>
+          <p:cNvPr id="59" name="Shape 57"/>
+          <p:cNvSpPr/>
+          <p:nvPr/>
+        </p:nvSpPr>
+        <p:spPr>
+          <a:xfrm>
+            <a:off x="304800" y="4891236"/>
+            <a:ext cx="8534400" cy="0"/>
           </a:xfrm>
           <a:prstGeom prst="line">
             <a:avLst/>
@@ -2195,40 +3052,40 @@
       </p:sp>
       <p:sp>
         <p:nvSpPr>
-          <p:cNvPr id="38" name="Text 36"/>
-          <p:cNvSpPr/>
-          <p:nvPr/>
-        </p:nvSpPr>
-        <p:spPr>
-          <a:xfrm>
-            <a:off x="297180" y="4937224"/>
-            <a:ext cx="8549640" cy="104775"/>
-          </a:xfrm>
-          <a:prstGeom prst="rect">
-            <a:avLst/>
-          </a:prstGeom>
-          <a:noFill/>
-          <a:ln/>
-        </p:spPr>
-        <p:txBody>
-          <a:bodyPr wrap="square" lIns="0" tIns="0" rIns="0" bIns="0" rtlCol="0" anchor="t"/>
-          <a:lstStyle/>
-          <a:p>
-            <a:pPr algn="ctr" indent="0" marL="0">
-              <a:buNone/>
-            </a:pPr>
-            <a:r>
-              <a:rPr lang="en-US" sz="800" i="1" dirty="0">
-                <a:solidFill>
-                  <a:srgbClr val="666666"/>
-                </a:solidFill>
-                <a:latin typeface="Times New Roman" pitchFamily="34" charset="0"/>
-                <a:ea typeface="Times New Roman" pitchFamily="34" charset="-122"/>
-                <a:cs typeface="Times New Roman" pitchFamily="34" charset="-120"/>
-              </a:rPr>
-              <a:t>This research applies proven OS scheduling theory to LLM API request management domain.</a:t>
-            </a:r>
-            <a:endParaRPr lang="en-US" sz="800" dirty="0"/>
+          <p:cNvPr id="60" name="Text 58"/>
+          <p:cNvSpPr/>
+          <p:nvPr/>
+        </p:nvSpPr>
+        <p:spPr>
+          <a:xfrm>
+            <a:off x="304800" y="4946749"/>
+            <a:ext cx="8705088" cy="95250"/>
+          </a:xfrm>
+          <a:prstGeom prst="rect">
+            <a:avLst/>
+          </a:prstGeom>
+          <a:noFill/>
+          <a:ln/>
+        </p:spPr>
+        <p:txBody>
+          <a:bodyPr wrap="square" lIns="0" tIns="0" rIns="0" bIns="0" rtlCol="0" anchor="t"/>
+          <a:lstStyle/>
+          <a:p>
+            <a:pPr algn="l" indent="0" marL="0">
+              <a:buNone/>
+            </a:pPr>
+            <a:r>
+              <a:rPr lang="en-US" sz="700" i="1" dirty="0">
+                <a:solidFill>
+                  <a:srgbClr val="999999"/>
+                </a:solidFill>
+                <a:latin typeface="Times New Roman" pitchFamily="34" charset="0"/>
+                <a:ea typeface="Times New Roman" pitchFamily="34" charset="-122"/>
+                <a:cs typeface="Times New Roman" pitchFamily="34" charset="-120"/>
+              </a:rPr>
+              <a:t>Stack: Node.js 22 LTS + Express.js 4.18 | Storage: Memory Arrays + JSON Files | 307 tests, 99.76% coverage</a:t>
+            </a:r>
+            <a:endParaRPr lang="en-US" sz="700" dirty="0"/>
           </a:p>
         </p:txBody>
       </p:sp>

--- a/04-proposal/figures/fig-3-request-flow.pptx
+++ b/04-proposal/figures/fig-3-request-flow.pptx
@@ -884,7 +884,7 @@
         <p:spPr>
           <a:xfrm>
             <a:off x="406301" y="279202"/>
-            <a:ext cx="8498026" cy="104775"/>
+            <a:ext cx="8498026" cy="123825"/>
           </a:xfrm>
           <a:prstGeom prst="rect">
             <a:avLst/>
@@ -904,11 +904,11 @@
                 <a:solidFill>
                   <a:srgbClr val="888888"/>
                 </a:solidFill>
-                <a:latin typeface="Times New Roman" pitchFamily="34" charset="0"/>
-                <a:ea typeface="Times New Roman" pitchFamily="34" charset="-122"/>
-                <a:cs typeface="Times New Roman" pitchFamily="34" charset="-120"/>
-              </a:rPr>
-              <a:t>PHASE 1: Request Ingestion</a:t>
+                <a:latin typeface="Malgun Gothic" pitchFamily="34" charset="0"/>
+                <a:ea typeface="Malgun Gothic" pitchFamily="34" charset="-122"/>
+                <a:cs typeface="Malgun Gothic" pitchFamily="34" charset="-120"/>
+              </a:rPr>
+              <a:t>단계 1: 요청 수신</a:t>
             </a:r>
             <a:endParaRPr lang="en-US" sz="800" dirty="0"/>
           </a:p>
@@ -922,8 +922,8 @@
         </p:nvSpPr>
         <p:spPr>
           <a:xfrm>
-            <a:off x="304800" y="460028"/>
-            <a:ext cx="1561951" cy="603052"/>
+            <a:off x="304800" y="479078"/>
+            <a:ext cx="1561951" cy="631627"/>
           </a:xfrm>
           <a:prstGeom prst="rect">
             <a:avLst/>
@@ -956,7 +956,7 @@
         </p:nvSpPr>
         <p:spPr>
           <a:xfrm>
-            <a:off x="438101" y="580579"/>
+            <a:off x="438101" y="599629"/>
             <a:ext cx="1295349" cy="152400"/>
           </a:xfrm>
           <a:prstGeom prst="rect">
@@ -977,11 +977,11 @@
                 <a:solidFill>
                   <a:srgbClr val="FFFFFF"/>
                 </a:solidFill>
-                <a:latin typeface="Times New Roman" pitchFamily="34" charset="0"/>
-                <a:ea typeface="Times New Roman" pitchFamily="34" charset="-122"/>
-                <a:cs typeface="Times New Roman" pitchFamily="34" charset="-120"/>
-              </a:rPr>
-              <a:t>Client</a:t>
+                <a:latin typeface="Malgun Gothic" pitchFamily="34" charset="0"/>
+                <a:ea typeface="Malgun Gothic" pitchFamily="34" charset="-122"/>
+                <a:cs typeface="Malgun Gothic" pitchFamily="34" charset="-120"/>
+              </a:rPr>
+              <a:t>클라이언트</a:t>
             </a:r>
             <a:endParaRPr lang="en-US" sz="1000" dirty="0"/>
           </a:p>
@@ -995,8 +995,8 @@
         </p:nvSpPr>
         <p:spPr>
           <a:xfrm>
-            <a:off x="438101" y="732979"/>
-            <a:ext cx="1295349" cy="104775"/>
+            <a:off x="438101" y="752029"/>
+            <a:ext cx="1295349" cy="123825"/>
           </a:xfrm>
           <a:prstGeom prst="rect">
             <a:avLst/>
@@ -1016,11 +1016,11 @@
                 <a:solidFill>
                   <a:srgbClr val="CCCCCC"/>
                 </a:solidFill>
-                <a:latin typeface="Times New Roman" pitchFamily="34" charset="0"/>
-                <a:ea typeface="Times New Roman" pitchFamily="34" charset="-122"/>
-                <a:cs typeface="Times New Roman" pitchFamily="34" charset="-120"/>
-              </a:rPr>
-              <a:t>REST API Call</a:t>
+                <a:latin typeface="Malgun Gothic" pitchFamily="34" charset="0"/>
+                <a:ea typeface="Malgun Gothic" pitchFamily="34" charset="-122"/>
+                <a:cs typeface="Malgun Gothic" pitchFamily="34" charset="-120"/>
+              </a:rPr>
+              <a:t>REST API 호출</a:t>
             </a:r>
             <a:endParaRPr lang="en-US" sz="750" dirty="0"/>
           </a:p>
@@ -1034,8 +1034,8 @@
         </p:nvSpPr>
         <p:spPr>
           <a:xfrm>
-            <a:off x="438101" y="837754"/>
-            <a:ext cx="1295349" cy="104775"/>
+            <a:off x="438101" y="875854"/>
+            <a:ext cx="1295349" cy="114300"/>
           </a:xfrm>
           <a:prstGeom prst="rect">
             <a:avLst/>
@@ -1055,9 +1055,9 @@
                 <a:solidFill>
                   <a:srgbClr val="CCCCCC"/>
                 </a:solidFill>
-                <a:latin typeface="Times New Roman" pitchFamily="34" charset="0"/>
-                <a:ea typeface="Times New Roman" pitchFamily="34" charset="-122"/>
-                <a:cs typeface="Times New Roman" pitchFamily="34" charset="-120"/>
+                <a:latin typeface="Malgun Gothic" pitchFamily="34" charset="0"/>
+                <a:ea typeface="Malgun Gothic" pitchFamily="34" charset="-122"/>
+                <a:cs typeface="Malgun Gothic" pitchFamily="34" charset="-120"/>
               </a:rPr>
               <a:t>POST /api/requests</a:t>
             </a:r>
@@ -1073,7 +1073,7 @@
         </p:nvSpPr>
         <p:spPr>
           <a:xfrm>
-            <a:off x="1942951" y="656779"/>
+            <a:off x="1942951" y="690116"/>
             <a:ext cx="181407" cy="209550"/>
           </a:xfrm>
           <a:prstGeom prst="rect">
@@ -1094,9 +1094,9 @@
                 <a:solidFill>
                   <a:srgbClr val="333333"/>
                 </a:solidFill>
-                <a:latin typeface="Times New Roman" pitchFamily="34" charset="0"/>
-                <a:ea typeface="Times New Roman" pitchFamily="34" charset="-122"/>
-                <a:cs typeface="Times New Roman" pitchFamily="34" charset="-120"/>
+                <a:latin typeface="Malgun Gothic" pitchFamily="34" charset="0"/>
+                <a:ea typeface="Malgun Gothic" pitchFamily="34" charset="-122"/>
+                <a:cs typeface="Malgun Gothic" pitchFamily="34" charset="-120"/>
               </a:rPr>
               <a:t>→</a:t>
             </a:r>
@@ -1112,8 +1112,8 @@
         </p:nvSpPr>
         <p:spPr>
           <a:xfrm>
-            <a:off x="2197001" y="460028"/>
-            <a:ext cx="4749998" cy="603052"/>
+            <a:off x="2197001" y="479078"/>
+            <a:ext cx="4749998" cy="631627"/>
           </a:xfrm>
           <a:prstGeom prst="rect">
             <a:avLst/>
@@ -1146,7 +1146,7 @@
         </p:nvSpPr>
         <p:spPr>
           <a:xfrm>
-            <a:off x="2298421" y="632966"/>
+            <a:off x="2298421" y="656779"/>
             <a:ext cx="4547158" cy="152400"/>
           </a:xfrm>
           <a:prstGeom prst="rect">
@@ -1167,11 +1167,11 @@
                 <a:solidFill>
                   <a:srgbClr val="333333"/>
                 </a:solidFill>
-                <a:latin typeface="Times New Roman" pitchFamily="34" charset="0"/>
-                <a:ea typeface="Times New Roman" pitchFamily="34" charset="-122"/>
-                <a:cs typeface="Times New Roman" pitchFamily="34" charset="-120"/>
-              </a:rPr>
-              <a:t>API Layer (Express.js)</a:t>
+                <a:latin typeface="Malgun Gothic" pitchFamily="34" charset="0"/>
+                <a:ea typeface="Malgun Gothic" pitchFamily="34" charset="-122"/>
+                <a:cs typeface="Malgun Gothic" pitchFamily="34" charset="-120"/>
+              </a:rPr>
+              <a:t>API 계층 (Express.js)</a:t>
             </a:r>
             <a:endParaRPr lang="en-US" sz="1000" dirty="0"/>
           </a:p>
@@ -1185,8 +1185,8 @@
         </p:nvSpPr>
         <p:spPr>
           <a:xfrm>
-            <a:off x="2298421" y="785366"/>
-            <a:ext cx="4547158" cy="104775"/>
+            <a:off x="2298421" y="809179"/>
+            <a:ext cx="4547158" cy="123825"/>
           </a:xfrm>
           <a:prstGeom prst="rect">
             <a:avLst/>
@@ -1206,11 +1206,11 @@
                 <a:solidFill>
                   <a:srgbClr val="666666"/>
                 </a:solidFill>
-                <a:latin typeface="Times New Roman" pitchFamily="34" charset="0"/>
-                <a:ea typeface="Times New Roman" pitchFamily="34" charset="-122"/>
-                <a:cs typeface="Times New Roman" pitchFamily="34" charset="-120"/>
-              </a:rPr>
-              <a:t>Request validation · Tenant identification · Priority assignment</a:t>
+                <a:latin typeface="Malgun Gothic" pitchFamily="34" charset="0"/>
+                <a:ea typeface="Malgun Gothic" pitchFamily="34" charset="-122"/>
+                <a:cs typeface="Malgun Gothic" pitchFamily="34" charset="-120"/>
+              </a:rPr>
+              <a:t>요청 검증 · 테넌트 식별 · 우선순위 할당</a:t>
             </a:r>
             <a:endParaRPr lang="en-US" sz="750" dirty="0"/>
           </a:p>
@@ -1224,7 +1224,7 @@
         </p:nvSpPr>
         <p:spPr>
           <a:xfrm>
-            <a:off x="7023199" y="656779"/>
+            <a:off x="7023199" y="690116"/>
             <a:ext cx="181407" cy="209550"/>
           </a:xfrm>
           <a:prstGeom prst="rect">
@@ -1245,9 +1245,9 @@
                 <a:solidFill>
                   <a:srgbClr val="333333"/>
                 </a:solidFill>
-                <a:latin typeface="Times New Roman" pitchFamily="34" charset="0"/>
-                <a:ea typeface="Times New Roman" pitchFamily="34" charset="-122"/>
-                <a:cs typeface="Times New Roman" pitchFamily="34" charset="-120"/>
+                <a:latin typeface="Malgun Gothic" pitchFamily="34" charset="0"/>
+                <a:ea typeface="Malgun Gothic" pitchFamily="34" charset="-122"/>
+                <a:cs typeface="Malgun Gothic" pitchFamily="34" charset="-120"/>
               </a:rPr>
               <a:t>→</a:t>
             </a:r>
@@ -1263,8 +1263,8 @@
         </p:nvSpPr>
         <p:spPr>
           <a:xfrm>
-            <a:off x="7277249" y="460028"/>
-            <a:ext cx="1561951" cy="603052"/>
+            <a:off x="7277249" y="479078"/>
+            <a:ext cx="1561951" cy="631627"/>
           </a:xfrm>
           <a:prstGeom prst="rect">
             <a:avLst/>
@@ -1297,8 +1297,8 @@
         </p:nvSpPr>
         <p:spPr>
           <a:xfrm>
-            <a:off x="7410550" y="585341"/>
-            <a:ext cx="1295349" cy="152400"/>
+            <a:off x="7410550" y="609154"/>
+            <a:ext cx="1295349" cy="142875"/>
           </a:xfrm>
           <a:prstGeom prst="rect">
             <a:avLst/>
@@ -1318,9 +1318,9 @@
                 <a:solidFill>
                   <a:srgbClr val="333333"/>
                 </a:solidFill>
-                <a:latin typeface="Times New Roman" pitchFamily="34" charset="0"/>
-                <a:ea typeface="Times New Roman" pitchFamily="34" charset="-122"/>
-                <a:cs typeface="Times New Roman" pitchFamily="34" charset="-120"/>
+                <a:latin typeface="Malgun Gothic" pitchFamily="34" charset="0"/>
+                <a:ea typeface="Malgun Gothic" pitchFamily="34" charset="-122"/>
+                <a:cs typeface="Malgun Gothic" pitchFamily="34" charset="-120"/>
               </a:rPr>
               <a:t>Rate Limiter</a:t>
             </a:r>
@@ -1336,7 +1336,46 @@
         </p:nvSpPr>
         <p:spPr>
           <a:xfrm>
-            <a:off x="7410550" y="737741"/>
+            <a:off x="7410550" y="752029"/>
+            <a:ext cx="1295349" cy="123825"/>
+          </a:xfrm>
+          <a:prstGeom prst="rect">
+            <a:avLst/>
+          </a:prstGeom>
+          <a:noFill/>
+          <a:ln/>
+        </p:spPr>
+        <p:txBody>
+          <a:bodyPr wrap="square" lIns="0" tIns="0" rIns="0" bIns="0" rtlCol="0" anchor="t"/>
+          <a:lstStyle/>
+          <a:p>
+            <a:pPr algn="ctr" indent="0" marL="0">
+              <a:buNone/>
+            </a:pPr>
+            <a:r>
+              <a:rPr lang="en-US" sz="750" dirty="0">
+                <a:solidFill>
+                  <a:srgbClr val="666666"/>
+                </a:solidFill>
+                <a:latin typeface="Malgun Gothic" pitchFamily="34" charset="0"/>
+                <a:ea typeface="Malgun Gothic" pitchFamily="34" charset="-122"/>
+                <a:cs typeface="Malgun Gothic" pitchFamily="34" charset="-120"/>
+              </a:rPr>
+              <a:t>토큰 버킷 확인</a:t>
+            </a:r>
+            <a:endParaRPr lang="en-US" sz="750" dirty="0"/>
+          </a:p>
+        </p:txBody>
+      </p:sp>
+      <p:sp>
+        <p:nvSpPr>
+          <p:cNvPr id="15" name="Text 13"/>
+          <p:cNvSpPr/>
+          <p:nvPr/>
+        </p:nvSpPr>
+        <p:spPr>
+          <a:xfrm>
+            <a:off x="7410550" y="875854"/>
             <a:ext cx="1295349" cy="104775"/>
           </a:xfrm>
           <a:prstGeom prst="rect">
@@ -1353,54 +1392,15 @@
               <a:buNone/>
             </a:pPr>
             <a:r>
-              <a:rPr lang="en-US" sz="750" dirty="0">
-                <a:solidFill>
-                  <a:srgbClr val="666666"/>
-                </a:solidFill>
-                <a:latin typeface="Times New Roman" pitchFamily="34" charset="0"/>
-                <a:ea typeface="Times New Roman" pitchFamily="34" charset="-122"/>
-                <a:cs typeface="Times New Roman" pitchFamily="34" charset="-120"/>
-              </a:rPr>
-              <a:t>Token Bucket check</a:t>
-            </a:r>
-            <a:endParaRPr lang="en-US" sz="750" dirty="0"/>
-          </a:p>
-        </p:txBody>
-      </p:sp>
-      <p:sp>
-        <p:nvSpPr>
-          <p:cNvPr id="15" name="Text 13"/>
-          <p:cNvSpPr/>
-          <p:nvPr/>
-        </p:nvSpPr>
-        <p:spPr>
-          <a:xfrm>
-            <a:off x="7410550" y="842516"/>
-            <a:ext cx="1295349" cy="95250"/>
-          </a:xfrm>
-          <a:prstGeom prst="rect">
-            <a:avLst/>
-          </a:prstGeom>
-          <a:noFill/>
-          <a:ln/>
-        </p:spPr>
-        <p:txBody>
-          <a:bodyPr wrap="square" lIns="0" tIns="0" rIns="0" bIns="0" rtlCol="0" anchor="t"/>
-          <a:lstStyle/>
-          <a:p>
-            <a:pPr algn="ctr" indent="0" marL="0">
-              <a:buNone/>
-            </a:pPr>
-            <a:r>
               <a:rPr lang="en-US" sz="700" i="1" dirty="0">
                 <a:solidFill>
                   <a:srgbClr val="999999"/>
                 </a:solidFill>
-                <a:latin typeface="Times New Roman" pitchFamily="34" charset="0"/>
-                <a:ea typeface="Times New Roman" pitchFamily="34" charset="-122"/>
-                <a:cs typeface="Times New Roman" pitchFamily="34" charset="-120"/>
-              </a:rPr>
-              <a:t>Reject if over limit</a:t>
+                <a:latin typeface="Malgun Gothic" pitchFamily="34" charset="0"/>
+                <a:ea typeface="Malgun Gothic" pitchFamily="34" charset="-122"/>
+                <a:cs typeface="Malgun Gothic" pitchFamily="34" charset="-120"/>
+              </a:rPr>
+              <a:t>한도 초과 시 거부</a:t>
             </a:r>
             <a:endParaRPr lang="en-US" sz="700" dirty="0"/>
           </a:p>
@@ -1414,8 +1414,8 @@
         </p:nvSpPr>
         <p:spPr>
           <a:xfrm>
-            <a:off x="4496544" y="1113681"/>
-            <a:ext cx="153930" cy="171450"/>
+            <a:off x="4497288" y="1161306"/>
+            <a:ext cx="152412" cy="180975"/>
           </a:xfrm>
           <a:prstGeom prst="rect">
             <a:avLst/>
@@ -1435,9 +1435,9 @@
                 <a:solidFill>
                   <a:srgbClr val="888888"/>
                 </a:solidFill>
-                <a:latin typeface="Times New Roman" pitchFamily="34" charset="0"/>
-                <a:ea typeface="Times New Roman" pitchFamily="34" charset="-122"/>
-                <a:cs typeface="Times New Roman" pitchFamily="34" charset="-120"/>
+                <a:latin typeface="Malgun Gothic" pitchFamily="34" charset="0"/>
+                <a:ea typeface="Malgun Gothic" pitchFamily="34" charset="-122"/>
+                <a:cs typeface="Malgun Gothic" pitchFamily="34" charset="-120"/>
               </a:rPr>
               <a:t>▼</a:t>
             </a:r>
@@ -1453,8 +1453,8 @@
         </p:nvSpPr>
         <p:spPr>
           <a:xfrm>
-            <a:off x="406301" y="1335732"/>
-            <a:ext cx="8498026" cy="104775"/>
+            <a:off x="406301" y="1392882"/>
+            <a:ext cx="8498026" cy="123825"/>
           </a:xfrm>
           <a:prstGeom prst="rect">
             <a:avLst/>
@@ -1474,11 +1474,11 @@
                 <a:solidFill>
                   <a:srgbClr val="888888"/>
                 </a:solidFill>
-                <a:latin typeface="Times New Roman" pitchFamily="34" charset="0"/>
-                <a:ea typeface="Times New Roman" pitchFamily="34" charset="-122"/>
-                <a:cs typeface="Times New Roman" pitchFamily="34" charset="-120"/>
-              </a:rPr>
-              <a:t>PHASE 2: Scheduling Decision (Runtime-Swappable)</a:t>
+                <a:latin typeface="Malgun Gothic" pitchFamily="34" charset="0"/>
+                <a:ea typeface="Malgun Gothic" pitchFamily="34" charset="-122"/>
+                <a:cs typeface="Malgun Gothic" pitchFamily="34" charset="-120"/>
+              </a:rPr>
+              <a:t>단계 2: 스케줄링 결정 (런타임 교체 가능)</a:t>
             </a:r>
             <a:endParaRPr lang="en-US" sz="800" dirty="0"/>
           </a:p>
@@ -1492,8 +1492,8 @@
         </p:nvSpPr>
         <p:spPr>
           <a:xfrm>
-            <a:off x="304800" y="1516559"/>
-            <a:ext cx="2076450" cy="504825"/>
+            <a:off x="304800" y="1592759"/>
+            <a:ext cx="2076450" cy="514350"/>
           </a:xfrm>
           <a:prstGeom prst="rect">
             <a:avLst/>
@@ -1526,8 +1526,8 @@
         </p:nvSpPr>
         <p:spPr>
           <a:xfrm>
-            <a:off x="397282" y="1649909"/>
-            <a:ext cx="1891486" cy="142875"/>
+            <a:off x="397282" y="1730871"/>
+            <a:ext cx="1891486" cy="133350"/>
           </a:xfrm>
           <a:prstGeom prst="rect">
             <a:avLst/>
@@ -1547,9 +1547,9 @@
                 <a:solidFill>
                   <a:srgbClr val="333333"/>
                 </a:solidFill>
-                <a:latin typeface="Times New Roman" pitchFamily="34" charset="0"/>
-                <a:ea typeface="Times New Roman" pitchFamily="34" charset="-122"/>
-                <a:cs typeface="Times New Roman" pitchFamily="34" charset="-120"/>
+                <a:latin typeface="Malgun Gothic" pitchFamily="34" charset="0"/>
+                <a:ea typeface="Malgun Gothic" pitchFamily="34" charset="-122"/>
+                <a:cs typeface="Malgun Gothic" pitchFamily="34" charset="-120"/>
               </a:rPr>
               <a:t>FCFS</a:t>
             </a:r>
@@ -1565,8 +1565,8 @@
         </p:nvSpPr>
         <p:spPr>
           <a:xfrm>
-            <a:off x="397282" y="1792784"/>
-            <a:ext cx="1891486" cy="95250"/>
+            <a:off x="397282" y="1864221"/>
+            <a:ext cx="1891486" cy="104775"/>
           </a:xfrm>
           <a:prstGeom prst="rect">
             <a:avLst/>
@@ -1586,11 +1586,11 @@
                 <a:solidFill>
                   <a:srgbClr val="666666"/>
                 </a:solidFill>
-                <a:latin typeface="Times New Roman" pitchFamily="34" charset="0"/>
-                <a:ea typeface="Times New Roman" pitchFamily="34" charset="-122"/>
-                <a:cs typeface="Times New Roman" pitchFamily="34" charset="-120"/>
-              </a:rPr>
-              <a:t>Arrival order</a:t>
+                <a:latin typeface="Malgun Gothic" pitchFamily="34" charset="0"/>
+                <a:ea typeface="Malgun Gothic" pitchFamily="34" charset="-122"/>
+                <a:cs typeface="Malgun Gothic" pitchFamily="34" charset="-120"/>
+              </a:rPr>
+              <a:t>도착 순서</a:t>
             </a:r>
             <a:endParaRPr lang="en-US" sz="700" dirty="0"/>
           </a:p>
@@ -1604,8 +1604,8 @@
         </p:nvSpPr>
         <p:spPr>
           <a:xfrm>
-            <a:off x="2457450" y="1516559"/>
-            <a:ext cx="2076450" cy="504825"/>
+            <a:off x="2457450" y="1592759"/>
+            <a:ext cx="2076450" cy="514350"/>
           </a:xfrm>
           <a:prstGeom prst="rect">
             <a:avLst/>
@@ -1638,8 +1638,8 @@
         </p:nvSpPr>
         <p:spPr>
           <a:xfrm>
-            <a:off x="2549932" y="1649909"/>
-            <a:ext cx="1891486" cy="142875"/>
+            <a:off x="2549932" y="1730871"/>
+            <a:ext cx="1891486" cy="133350"/>
           </a:xfrm>
           <a:prstGeom prst="rect">
             <a:avLst/>
@@ -1659,9 +1659,9 @@
                 <a:solidFill>
                   <a:srgbClr val="333333"/>
                 </a:solidFill>
-                <a:latin typeface="Times New Roman" pitchFamily="34" charset="0"/>
-                <a:ea typeface="Times New Roman" pitchFamily="34" charset="-122"/>
-                <a:cs typeface="Times New Roman" pitchFamily="34" charset="-120"/>
+                <a:latin typeface="Malgun Gothic" pitchFamily="34" charset="0"/>
+                <a:ea typeface="Malgun Gothic" pitchFamily="34" charset="-122"/>
+                <a:cs typeface="Malgun Gothic" pitchFamily="34" charset="-120"/>
               </a:rPr>
               <a:t>Priority</a:t>
             </a:r>
@@ -1677,8 +1677,8 @@
         </p:nvSpPr>
         <p:spPr>
           <a:xfrm>
-            <a:off x="2549932" y="1792784"/>
-            <a:ext cx="1891486" cy="95250"/>
+            <a:off x="2549932" y="1864221"/>
+            <a:ext cx="1891486" cy="104775"/>
           </a:xfrm>
           <a:prstGeom prst="rect">
             <a:avLst/>
@@ -1698,11 +1698,11 @@
                 <a:solidFill>
                   <a:srgbClr val="666666"/>
                 </a:solidFill>
-                <a:latin typeface="Times New Roman" pitchFamily="34" charset="0"/>
-                <a:ea typeface="Times New Roman" pitchFamily="34" charset="-122"/>
-                <a:cs typeface="Times New Roman" pitchFamily="34" charset="-120"/>
-              </a:rPr>
-              <a:t>4-level + Aging</a:t>
+                <a:latin typeface="Malgun Gothic" pitchFamily="34" charset="0"/>
+                <a:ea typeface="Malgun Gothic" pitchFamily="34" charset="-122"/>
+                <a:cs typeface="Malgun Gothic" pitchFamily="34" charset="-120"/>
+              </a:rPr>
+              <a:t>4단계 + 에이징</a:t>
             </a:r>
             <a:endParaRPr lang="en-US" sz="700" dirty="0"/>
           </a:p>
@@ -1716,8 +1716,8 @@
         </p:nvSpPr>
         <p:spPr>
           <a:xfrm>
-            <a:off x="4610100" y="1516559"/>
-            <a:ext cx="2076450" cy="504825"/>
+            <a:off x="4610100" y="1592759"/>
+            <a:ext cx="2076450" cy="514350"/>
           </a:xfrm>
           <a:prstGeom prst="rect">
             <a:avLst/>
@@ -1750,8 +1750,8 @@
         </p:nvSpPr>
         <p:spPr>
           <a:xfrm>
-            <a:off x="4702582" y="1602284"/>
-            <a:ext cx="1891486" cy="142875"/>
+            <a:off x="4702582" y="1678484"/>
+            <a:ext cx="1891486" cy="133350"/>
           </a:xfrm>
           <a:prstGeom prst="rect">
             <a:avLst/>
@@ -1771,9 +1771,9 @@
                 <a:solidFill>
                   <a:srgbClr val="2B579A"/>
                 </a:solidFill>
-                <a:latin typeface="Times New Roman" pitchFamily="34" charset="0"/>
-                <a:ea typeface="Times New Roman" pitchFamily="34" charset="-122"/>
-                <a:cs typeface="Times New Roman" pitchFamily="34" charset="-120"/>
+                <a:latin typeface="Malgun Gothic" pitchFamily="34" charset="0"/>
+                <a:ea typeface="Malgun Gothic" pitchFamily="34" charset="-122"/>
+                <a:cs typeface="Malgun Gothic" pitchFamily="34" charset="-120"/>
               </a:rPr>
               <a:t>MLFQ</a:t>
             </a:r>
@@ -1789,8 +1789,8 @@
         </p:nvSpPr>
         <p:spPr>
           <a:xfrm>
-            <a:off x="4702582" y="1745159"/>
-            <a:ext cx="1891486" cy="95250"/>
+            <a:off x="4702582" y="1811834"/>
+            <a:ext cx="1891486" cy="104775"/>
           </a:xfrm>
           <a:prstGeom prst="rect">
             <a:avLst/>
@@ -1810,11 +1810,11 @@
                 <a:solidFill>
                   <a:srgbClr val="555555"/>
                 </a:solidFill>
-                <a:latin typeface="Times New Roman" pitchFamily="34" charset="0"/>
-                <a:ea typeface="Times New Roman" pitchFamily="34" charset="-122"/>
-                <a:cs typeface="Times New Roman" pitchFamily="34" charset="-120"/>
-              </a:rPr>
-              <a:t>4 queues + Preemption</a:t>
+                <a:latin typeface="Malgun Gothic" pitchFamily="34" charset="0"/>
+                <a:ea typeface="Malgun Gothic" pitchFamily="34" charset="-122"/>
+                <a:cs typeface="Malgun Gothic" pitchFamily="34" charset="-120"/>
+              </a:rPr>
+              <a:t>4단계 큐 + 선점</a:t>
             </a:r>
             <a:endParaRPr lang="en-US" sz="700" dirty="0"/>
           </a:p>
@@ -1828,8 +1828,8 @@
         </p:nvSpPr>
         <p:spPr>
           <a:xfrm>
-            <a:off x="4702582" y="1840409"/>
-            <a:ext cx="1891486" cy="95250"/>
+            <a:off x="4702582" y="1916609"/>
+            <a:ext cx="1891486" cy="104775"/>
           </a:xfrm>
           <a:prstGeom prst="rect">
             <a:avLst/>
@@ -1849,11 +1849,11 @@
                 <a:solidFill>
                   <a:srgbClr val="888888"/>
                 </a:solidFill>
-                <a:latin typeface="Times New Roman" pitchFamily="34" charset="0"/>
-                <a:ea typeface="Times New Roman" pitchFamily="34" charset="-122"/>
-                <a:cs typeface="Times New Roman" pitchFamily="34" charset="-120"/>
-              </a:rPr>
-              <a:t>Q0:500ms Q1:1.5s Q2:4s Q3:∞</a:t>
+                <a:latin typeface="Malgun Gothic" pitchFamily="34" charset="0"/>
+                <a:ea typeface="Malgun Gothic" pitchFamily="34" charset="-122"/>
+                <a:cs typeface="Malgun Gothic" pitchFamily="34" charset="-120"/>
+              </a:rPr>
+              <a:t>Q0:500ms Q1:1.5s Q2:4s Q3:무제한</a:t>
             </a:r>
             <a:endParaRPr lang="en-US" sz="650" dirty="0"/>
           </a:p>
@@ -1867,8 +1867,8 @@
         </p:nvSpPr>
         <p:spPr>
           <a:xfrm>
-            <a:off x="6762750" y="1516559"/>
-            <a:ext cx="2076450" cy="504825"/>
+            <a:off x="6762750" y="1592759"/>
+            <a:ext cx="2076450" cy="514350"/>
           </a:xfrm>
           <a:prstGeom prst="rect">
             <a:avLst/>
@@ -1901,8 +1901,8 @@
         </p:nvSpPr>
         <p:spPr>
           <a:xfrm>
-            <a:off x="6855232" y="1602284"/>
-            <a:ext cx="1891486" cy="142875"/>
+            <a:off x="6855232" y="1678484"/>
+            <a:ext cx="1891486" cy="133350"/>
           </a:xfrm>
           <a:prstGeom prst="rect">
             <a:avLst/>
@@ -1922,9 +1922,9 @@
                 <a:solidFill>
                   <a:srgbClr val="2B579A"/>
                 </a:solidFill>
-                <a:latin typeface="Times New Roman" pitchFamily="34" charset="0"/>
-                <a:ea typeface="Times New Roman" pitchFamily="34" charset="-122"/>
-                <a:cs typeface="Times New Roman" pitchFamily="34" charset="-120"/>
+                <a:latin typeface="Malgun Gothic" pitchFamily="34" charset="0"/>
+                <a:ea typeface="Malgun Gothic" pitchFamily="34" charset="-122"/>
+                <a:cs typeface="Malgun Gothic" pitchFamily="34" charset="-120"/>
               </a:rPr>
               <a:t>WFQ</a:t>
             </a:r>
@@ -1940,8 +1940,8 @@
         </p:nvSpPr>
         <p:spPr>
           <a:xfrm>
-            <a:off x="6855232" y="1745159"/>
-            <a:ext cx="1891486" cy="95250"/>
+            <a:off x="6855232" y="1811834"/>
+            <a:ext cx="1891486" cy="104775"/>
           </a:xfrm>
           <a:prstGeom prst="rect">
             <a:avLst/>
@@ -1961,11 +1961,11 @@
                 <a:solidFill>
                   <a:srgbClr val="555555"/>
                 </a:solidFill>
-                <a:latin typeface="Times New Roman" pitchFamily="34" charset="0"/>
-                <a:ea typeface="Times New Roman" pitchFamily="34" charset="-122"/>
-                <a:cs typeface="Times New Roman" pitchFamily="34" charset="-120"/>
-              </a:rPr>
-              <a:t>Virtual Finish Time</a:t>
+                <a:latin typeface="Malgun Gothic" pitchFamily="34" charset="0"/>
+                <a:ea typeface="Malgun Gothic" pitchFamily="34" charset="-122"/>
+                <a:cs typeface="Malgun Gothic" pitchFamily="34" charset="-120"/>
+              </a:rPr>
+              <a:t>가상 종료 시각</a:t>
             </a:r>
             <a:endParaRPr lang="en-US" sz="700" dirty="0"/>
           </a:p>
@@ -1979,8 +1979,8 @@
         </p:nvSpPr>
         <p:spPr>
           <a:xfrm>
-            <a:off x="6855232" y="1840409"/>
-            <a:ext cx="1891486" cy="95250"/>
+            <a:off x="6855232" y="1916609"/>
+            <a:ext cx="1891486" cy="104775"/>
           </a:xfrm>
           <a:prstGeom prst="rect">
             <a:avLst/>
@@ -2000,11 +2000,11 @@
                 <a:solidFill>
                   <a:srgbClr val="888888"/>
                 </a:solidFill>
-                <a:latin typeface="Times New Roman" pitchFamily="34" charset="0"/>
-                <a:ea typeface="Times New Roman" pitchFamily="34" charset="-122"/>
-                <a:cs typeface="Times New Roman" pitchFamily="34" charset="-120"/>
-              </a:rPr>
-              <a:t>Weight: 100/50/10/1</a:t>
+                <a:latin typeface="Malgun Gothic" pitchFamily="34" charset="0"/>
+                <a:ea typeface="Malgun Gothic" pitchFamily="34" charset="-122"/>
+                <a:cs typeface="Malgun Gothic" pitchFamily="34" charset="-120"/>
+              </a:rPr>
+              <a:t>가중치: 100/50/10/1</a:t>
             </a:r>
             <a:endParaRPr lang="en-US" sz="650" dirty="0"/>
           </a:p>
@@ -2018,8 +2018,8 @@
         </p:nvSpPr>
         <p:spPr>
           <a:xfrm>
-            <a:off x="3484513" y="2059335"/>
-            <a:ext cx="2218322" cy="95250"/>
+            <a:off x="3470225" y="2145060"/>
+            <a:ext cx="2247620" cy="114300"/>
           </a:xfrm>
           <a:prstGeom prst="rect">
             <a:avLst/>
@@ -2039,11 +2039,11 @@
                 <a:solidFill>
                   <a:srgbClr val="999999"/>
                 </a:solidFill>
-                <a:latin typeface="Times New Roman" pitchFamily="34" charset="0"/>
-                <a:ea typeface="Times New Roman" pitchFamily="34" charset="-122"/>
-                <a:cs typeface="Times New Roman" pitchFamily="34" charset="-120"/>
-              </a:rPr>
-              <a:t>PUT /api/scheduler → Runtime algorithm switch (no restart)</a:t>
+                <a:latin typeface="Malgun Gothic" pitchFamily="34" charset="0"/>
+                <a:ea typeface="Malgun Gothic" pitchFamily="34" charset="-122"/>
+                <a:cs typeface="Malgun Gothic" pitchFamily="34" charset="-120"/>
+              </a:rPr>
+              <a:t>PUT /api/scheduler → 런타임 알고리즘 전환 (재시작 불필요)</a:t>
             </a:r>
             <a:endParaRPr lang="en-US" sz="700" dirty="0"/>
           </a:p>
@@ -2057,8 +2057,8 @@
         </p:nvSpPr>
         <p:spPr>
           <a:xfrm>
-            <a:off x="4496544" y="2192536"/>
-            <a:ext cx="153930" cy="171450"/>
+            <a:off x="4497288" y="2297311"/>
+            <a:ext cx="152412" cy="180975"/>
           </a:xfrm>
           <a:prstGeom prst="rect">
             <a:avLst/>
@@ -2078,9 +2078,9 @@
                 <a:solidFill>
                   <a:srgbClr val="888888"/>
                 </a:solidFill>
-                <a:latin typeface="Times New Roman" pitchFamily="34" charset="0"/>
-                <a:ea typeface="Times New Roman" pitchFamily="34" charset="-122"/>
-                <a:cs typeface="Times New Roman" pitchFamily="34" charset="-120"/>
+                <a:latin typeface="Malgun Gothic" pitchFamily="34" charset="0"/>
+                <a:ea typeface="Malgun Gothic" pitchFamily="34" charset="-122"/>
+                <a:cs typeface="Malgun Gothic" pitchFamily="34" charset="-120"/>
               </a:rPr>
               <a:t>▼</a:t>
             </a:r>
@@ -2096,8 +2096,8 @@
         </p:nvSpPr>
         <p:spPr>
           <a:xfrm>
-            <a:off x="406301" y="2414588"/>
-            <a:ext cx="8498026" cy="104775"/>
+            <a:off x="406301" y="2528888"/>
+            <a:ext cx="8498026" cy="123825"/>
           </a:xfrm>
           <a:prstGeom prst="rect">
             <a:avLst/>
@@ -2117,11 +2117,11 @@
                 <a:solidFill>
                   <a:srgbClr val="888888"/>
                 </a:solidFill>
-                <a:latin typeface="Times New Roman" pitchFamily="34" charset="0"/>
-                <a:ea typeface="Times New Roman" pitchFamily="34" charset="-122"/>
-                <a:cs typeface="Times New Roman" pitchFamily="34" charset="-120"/>
-              </a:rPr>
-              <a:t>PHASE 3: Execution &amp; Response</a:t>
+                <a:latin typeface="Malgun Gothic" pitchFamily="34" charset="0"/>
+                <a:ea typeface="Malgun Gothic" pitchFamily="34" charset="-122"/>
+                <a:cs typeface="Malgun Gothic" pitchFamily="34" charset="-120"/>
+              </a:rPr>
+              <a:t>단계 3: 실행 및 응답</a:t>
             </a:r>
             <a:endParaRPr lang="en-US" sz="800" dirty="0"/>
           </a:p>
@@ -2135,8 +2135,8 @@
         </p:nvSpPr>
         <p:spPr>
           <a:xfrm>
-            <a:off x="304800" y="2595414"/>
-            <a:ext cx="4749998" cy="603052"/>
+            <a:off x="304800" y="2728764"/>
+            <a:ext cx="4749998" cy="641152"/>
           </a:xfrm>
           <a:prstGeom prst="rect">
             <a:avLst/>
@@ -2169,7 +2169,7 @@
         </p:nvSpPr>
         <p:spPr>
           <a:xfrm>
-            <a:off x="406220" y="2768352"/>
+            <a:off x="406220" y="2911227"/>
             <a:ext cx="4547158" cy="152400"/>
           </a:xfrm>
           <a:prstGeom prst="rect">
@@ -2190,11 +2190,11 @@
                 <a:solidFill>
                   <a:srgbClr val="333333"/>
                 </a:solidFill>
-                <a:latin typeface="Times New Roman" pitchFamily="34" charset="0"/>
-                <a:ea typeface="Times New Roman" pitchFamily="34" charset="-122"/>
-                <a:cs typeface="Times New Roman" pitchFamily="34" charset="-120"/>
-              </a:rPr>
-              <a:t>Request Manager</a:t>
+                <a:latin typeface="Malgun Gothic" pitchFamily="34" charset="0"/>
+                <a:ea typeface="Malgun Gothic" pitchFamily="34" charset="-122"/>
+                <a:cs typeface="Malgun Gothic" pitchFamily="34" charset="-120"/>
+              </a:rPr>
+              <a:t>요청 관리자</a:t>
             </a:r>
             <a:endParaRPr lang="en-US" sz="1000" dirty="0"/>
           </a:p>
@@ -2208,8 +2208,8 @@
         </p:nvSpPr>
         <p:spPr>
           <a:xfrm>
-            <a:off x="406220" y="2920752"/>
-            <a:ext cx="4547158" cy="104775"/>
+            <a:off x="406220" y="3063627"/>
+            <a:ext cx="4547158" cy="123825"/>
           </a:xfrm>
           <a:prstGeom prst="rect">
             <a:avLst/>
@@ -2229,11 +2229,11 @@
                 <a:solidFill>
                   <a:srgbClr val="666666"/>
                 </a:solidFill>
-                <a:latin typeface="Times New Roman" pitchFamily="34" charset="0"/>
-                <a:ea typeface="Times New Roman" pitchFamily="34" charset="-122"/>
-                <a:cs typeface="Times New Roman" pitchFamily="34" charset="-120"/>
-              </a:rPr>
-              <a:t>Dequeue next request · Forward to LLM backend</a:t>
+                <a:latin typeface="Malgun Gothic" pitchFamily="34" charset="0"/>
+                <a:ea typeface="Malgun Gothic" pitchFamily="34" charset="-122"/>
+                <a:cs typeface="Malgun Gothic" pitchFamily="34" charset="-120"/>
+              </a:rPr>
+              <a:t>다음 요청 추출 · LLM 백엔드로 전달</a:t>
             </a:r>
             <a:endParaRPr lang="en-US" sz="750" dirty="0"/>
           </a:p>
@@ -2247,7 +2247,7 @@
         </p:nvSpPr>
         <p:spPr>
           <a:xfrm>
-            <a:off x="5130998" y="2792164"/>
+            <a:off x="5130998" y="2944564"/>
             <a:ext cx="181407" cy="209550"/>
           </a:xfrm>
           <a:prstGeom prst="rect">
@@ -2268,9 +2268,9 @@
                 <a:solidFill>
                   <a:srgbClr val="333333"/>
                 </a:solidFill>
-                <a:latin typeface="Times New Roman" pitchFamily="34" charset="0"/>
-                <a:ea typeface="Times New Roman" pitchFamily="34" charset="-122"/>
-                <a:cs typeface="Times New Roman" pitchFamily="34" charset="-120"/>
+                <a:latin typeface="Malgun Gothic" pitchFamily="34" charset="0"/>
+                <a:ea typeface="Malgun Gothic" pitchFamily="34" charset="-122"/>
+                <a:cs typeface="Malgun Gothic" pitchFamily="34" charset="-120"/>
               </a:rPr>
               <a:t>→</a:t>
             </a:r>
@@ -2286,8 +2286,8 @@
         </p:nvSpPr>
         <p:spPr>
           <a:xfrm>
-            <a:off x="5385048" y="2595414"/>
-            <a:ext cx="1688902" cy="603052"/>
+            <a:off x="5385048" y="2728764"/>
+            <a:ext cx="1688902" cy="641152"/>
           </a:xfrm>
           <a:prstGeom prst="rect">
             <a:avLst/>
@@ -2320,8 +2320,8 @@
         </p:nvSpPr>
         <p:spPr>
           <a:xfrm>
-            <a:off x="5517079" y="2768352"/>
-            <a:ext cx="1424839" cy="152400"/>
+            <a:off x="5517079" y="2915989"/>
+            <a:ext cx="1424839" cy="142875"/>
           </a:xfrm>
           <a:prstGeom prst="rect">
             <a:avLst/>
@@ -2341,9 +2341,9 @@
                 <a:solidFill>
                   <a:srgbClr val="FFFFFF"/>
                 </a:solidFill>
-                <a:latin typeface="Times New Roman" pitchFamily="34" charset="0"/>
-                <a:ea typeface="Times New Roman" pitchFamily="34" charset="-122"/>
-                <a:cs typeface="Times New Roman" pitchFamily="34" charset="-120"/>
+                <a:latin typeface="Malgun Gothic" pitchFamily="34" charset="0"/>
+                <a:ea typeface="Malgun Gothic" pitchFamily="34" charset="-122"/>
+                <a:cs typeface="Malgun Gothic" pitchFamily="34" charset="-120"/>
               </a:rPr>
               <a:t>Ollama (LLM)</a:t>
             </a:r>
@@ -2359,8 +2359,8 @@
         </p:nvSpPr>
         <p:spPr>
           <a:xfrm>
-            <a:off x="5517079" y="2920752"/>
-            <a:ext cx="1424839" cy="104775"/>
+            <a:off x="5517079" y="3058864"/>
+            <a:ext cx="1424839" cy="123825"/>
           </a:xfrm>
           <a:prstGeom prst="rect">
             <a:avLst/>
@@ -2380,11 +2380,11 @@
                 <a:solidFill>
                   <a:srgbClr val="CCCCCC"/>
                 </a:solidFill>
-                <a:latin typeface="Times New Roman" pitchFamily="34" charset="0"/>
-                <a:ea typeface="Times New Roman" pitchFamily="34" charset="-122"/>
-                <a:cs typeface="Times New Roman" pitchFamily="34" charset="-120"/>
-              </a:rPr>
-              <a:t>Local inference</a:t>
+                <a:latin typeface="Malgun Gothic" pitchFamily="34" charset="0"/>
+                <a:ea typeface="Malgun Gothic" pitchFamily="34" charset="-122"/>
+                <a:cs typeface="Malgun Gothic" pitchFamily="34" charset="-120"/>
+              </a:rPr>
+              <a:t>로컬 추론</a:t>
             </a:r>
             <a:endParaRPr lang="en-US" sz="750" dirty="0"/>
           </a:p>
@@ -2398,7 +2398,7 @@
         </p:nvSpPr>
         <p:spPr>
           <a:xfrm>
-            <a:off x="7150150" y="2792164"/>
+            <a:off x="7150150" y="2944564"/>
             <a:ext cx="181407" cy="209550"/>
           </a:xfrm>
           <a:prstGeom prst="rect">
@@ -2419,9 +2419,9 @@
                 <a:solidFill>
                   <a:srgbClr val="333333"/>
                 </a:solidFill>
-                <a:latin typeface="Times New Roman" pitchFamily="34" charset="0"/>
-                <a:ea typeface="Times New Roman" pitchFamily="34" charset="-122"/>
-                <a:cs typeface="Times New Roman" pitchFamily="34" charset="-120"/>
+                <a:latin typeface="Malgun Gothic" pitchFamily="34" charset="0"/>
+                <a:ea typeface="Malgun Gothic" pitchFamily="34" charset="-122"/>
+                <a:cs typeface="Malgun Gothic" pitchFamily="34" charset="-120"/>
               </a:rPr>
               <a:t>→</a:t>
             </a:r>
@@ -2437,8 +2437,8 @@
         </p:nvSpPr>
         <p:spPr>
           <a:xfrm>
-            <a:off x="7404199" y="2595414"/>
-            <a:ext cx="1435001" cy="603052"/>
+            <a:off x="7404199" y="2728764"/>
+            <a:ext cx="1435001" cy="641152"/>
           </a:xfrm>
           <a:prstGeom prst="rect">
             <a:avLst/>
@@ -2471,7 +2471,7 @@
         </p:nvSpPr>
         <p:spPr>
           <a:xfrm>
-            <a:off x="7538770" y="2715964"/>
+            <a:off x="7538770" y="2849314"/>
             <a:ext cx="1165860" cy="152400"/>
           </a:xfrm>
           <a:prstGeom prst="rect">
@@ -2492,11 +2492,11 @@
                 <a:solidFill>
                   <a:srgbClr val="333333"/>
                 </a:solidFill>
-                <a:latin typeface="Times New Roman" pitchFamily="34" charset="0"/>
-                <a:ea typeface="Times New Roman" pitchFamily="34" charset="-122"/>
-                <a:cs typeface="Times New Roman" pitchFamily="34" charset="-120"/>
-              </a:rPr>
-              <a:t>Response</a:t>
+                <a:latin typeface="Malgun Gothic" pitchFamily="34" charset="0"/>
+                <a:ea typeface="Malgun Gothic" pitchFamily="34" charset="-122"/>
+                <a:cs typeface="Malgun Gothic" pitchFamily="34" charset="-120"/>
+              </a:rPr>
+              <a:t>응답</a:t>
             </a:r>
             <a:endParaRPr lang="en-US" sz="1000" dirty="0"/>
           </a:p>
@@ -2510,8 +2510,8 @@
         </p:nvSpPr>
         <p:spPr>
           <a:xfrm>
-            <a:off x="7538770" y="2868364"/>
-            <a:ext cx="1165860" cy="104775"/>
+            <a:off x="7538770" y="3001714"/>
+            <a:ext cx="1165860" cy="123825"/>
           </a:xfrm>
           <a:prstGeom prst="rect">
             <a:avLst/>
@@ -2531,11 +2531,11 @@
                 <a:solidFill>
                   <a:srgbClr val="666666"/>
                 </a:solidFill>
-                <a:latin typeface="Times New Roman" pitchFamily="34" charset="0"/>
-                <a:ea typeface="Times New Roman" pitchFamily="34" charset="-122"/>
-                <a:cs typeface="Times New Roman" pitchFamily="34" charset="-120"/>
-              </a:rPr>
-              <a:t>Wait time logged</a:t>
+                <a:latin typeface="Malgun Gothic" pitchFamily="34" charset="0"/>
+                <a:ea typeface="Malgun Gothic" pitchFamily="34" charset="-122"/>
+                <a:cs typeface="Malgun Gothic" pitchFamily="34" charset="-120"/>
+              </a:rPr>
+              <a:t>대기시간 기록</a:t>
             </a:r>
             <a:endParaRPr lang="en-US" sz="750" dirty="0"/>
           </a:p>
@@ -2549,8 +2549,8 @@
         </p:nvSpPr>
         <p:spPr>
           <a:xfrm>
-            <a:off x="7538770" y="2973139"/>
-            <a:ext cx="1165860" cy="104775"/>
+            <a:off x="7538770" y="3125539"/>
+            <a:ext cx="1165860" cy="123825"/>
           </a:xfrm>
           <a:prstGeom prst="rect">
             <a:avLst/>
@@ -2570,11 +2570,11 @@
                 <a:solidFill>
                   <a:srgbClr val="666666"/>
                 </a:solidFill>
-                <a:latin typeface="Times New Roman" pitchFamily="34" charset="0"/>
-                <a:ea typeface="Times New Roman" pitchFamily="34" charset="-122"/>
-                <a:cs typeface="Times New Roman" pitchFamily="34" charset="-120"/>
-              </a:rPr>
-              <a:t>JFI calculated</a:t>
+                <a:latin typeface="Malgun Gothic" pitchFamily="34" charset="0"/>
+                <a:ea typeface="Malgun Gothic" pitchFamily="34" charset="-122"/>
+                <a:cs typeface="Malgun Gothic" pitchFamily="34" charset="-120"/>
+              </a:rPr>
+              <a:t>JFI 계산</a:t>
             </a:r>
             <a:endParaRPr lang="en-US" sz="750" dirty="0"/>
           </a:p>
@@ -2588,8 +2588,8 @@
         </p:nvSpPr>
         <p:spPr>
           <a:xfrm>
-            <a:off x="304800" y="3299966"/>
-            <a:ext cx="2777133" cy="441127"/>
+            <a:off x="304800" y="3471416"/>
+            <a:ext cx="2777133" cy="479227"/>
           </a:xfrm>
           <a:prstGeom prst="rect">
             <a:avLst/>
@@ -2620,7 +2620,46 @@
         </p:nvSpPr>
         <p:spPr>
           <a:xfrm>
-            <a:off x="415826" y="3372892"/>
+            <a:off x="415826" y="3544342"/>
+            <a:ext cx="2606183" cy="123825"/>
+          </a:xfrm>
+          <a:prstGeom prst="rect">
+            <a:avLst/>
+          </a:prstGeom>
+          <a:noFill/>
+          <a:ln/>
+        </p:spPr>
+        <p:txBody>
+          <a:bodyPr wrap="square" lIns="0" tIns="0" rIns="0" bIns="0" rtlCol="0" anchor="t"/>
+          <a:lstStyle/>
+          <a:p>
+            <a:pPr algn="l" indent="0" marL="0">
+              <a:buNone/>
+            </a:pPr>
+            <a:r>
+              <a:rPr lang="en-US" sz="800" b="1" dirty="0">
+                <a:solidFill>
+                  <a:srgbClr val="333333"/>
+                </a:solidFill>
+                <a:latin typeface="Malgun Gothic" pitchFamily="34" charset="0"/>
+                <a:ea typeface="Malgun Gothic" pitchFamily="34" charset="-122"/>
+                <a:cs typeface="Malgun Gothic" pitchFamily="34" charset="-120"/>
+              </a:rPr>
+              <a:t>기아 방지</a:t>
+            </a:r>
+            <a:endParaRPr lang="en-US" sz="800" dirty="0"/>
+          </a:p>
+        </p:txBody>
+      </p:sp>
+      <p:sp>
+        <p:nvSpPr>
+          <p:cNvPr id="49" name="Text 47"/>
+          <p:cNvSpPr/>
+          <p:nvPr/>
+        </p:nvSpPr>
+        <p:spPr>
+          <a:xfrm>
+            <a:off x="415826" y="3668167"/>
             <a:ext cx="2606183" cy="104775"/>
           </a:xfrm>
           <a:prstGeom prst="rect">
@@ -2637,30 +2676,30 @@
               <a:buNone/>
             </a:pPr>
             <a:r>
-              <a:rPr lang="en-US" sz="800" b="1" dirty="0">
-                <a:solidFill>
-                  <a:srgbClr val="333333"/>
-                </a:solidFill>
-                <a:latin typeface="Times New Roman" pitchFamily="34" charset="0"/>
-                <a:ea typeface="Times New Roman" pitchFamily="34" charset="-122"/>
-                <a:cs typeface="Times New Roman" pitchFamily="34" charset="-120"/>
-              </a:rPr>
-              <a:t>Starvation Prevention</a:t>
-            </a:r>
-            <a:endParaRPr lang="en-US" sz="800" dirty="0"/>
-          </a:p>
-        </p:txBody>
-      </p:sp>
-      <p:sp>
-        <p:nvSpPr>
-          <p:cNvPr id="49" name="Text 47"/>
-          <p:cNvSpPr/>
-          <p:nvPr/>
-        </p:nvSpPr>
-        <p:spPr>
-          <a:xfrm>
-            <a:off x="415826" y="3477667"/>
-            <a:ext cx="2606183" cy="95250"/>
+              <a:rPr lang="en-US" sz="700" dirty="0">
+                <a:solidFill>
+                  <a:srgbClr val="666666"/>
+                </a:solidFill>
+                <a:latin typeface="Malgun Gothic" pitchFamily="34" charset="0"/>
+                <a:ea typeface="Malgun Gothic" pitchFamily="34" charset="-122"/>
+                <a:cs typeface="Malgun Gothic" pitchFamily="34" charset="-120"/>
+              </a:rPr>
+              <a:t>Priority: 에이징 (자동 승격)</a:t>
+            </a:r>
+            <a:endParaRPr lang="en-US" sz="700" dirty="0"/>
+          </a:p>
+        </p:txBody>
+      </p:sp>
+      <p:sp>
+        <p:nvSpPr>
+          <p:cNvPr id="50" name="Text 48"/>
+          <p:cNvSpPr/>
+          <p:nvPr/>
+        </p:nvSpPr>
+        <p:spPr>
+          <a:xfrm>
+            <a:off x="415826" y="3772942"/>
+            <a:ext cx="2606183" cy="104775"/>
           </a:xfrm>
           <a:prstGeom prst="rect">
             <a:avLst/>
@@ -2680,11 +2719,11 @@
                 <a:solidFill>
                   <a:srgbClr val="666666"/>
                 </a:solidFill>
-                <a:latin typeface="Times New Roman" pitchFamily="34" charset="0"/>
-                <a:ea typeface="Times New Roman" pitchFamily="34" charset="-122"/>
-                <a:cs typeface="Times New Roman" pitchFamily="34" charset="-120"/>
-              </a:rPr>
-              <a:t>Priority: Aging (auto-promote)</a:t>
+                <a:latin typeface="Malgun Gothic" pitchFamily="34" charset="0"/>
+                <a:ea typeface="Malgun Gothic" pitchFamily="34" charset="-122"/>
+                <a:cs typeface="Malgun Gothic" pitchFamily="34" charset="-120"/>
+              </a:rPr>
+              <a:t>MLFQ: 주기적 부스트 (전체 → Q0)</a:t>
             </a:r>
             <a:endParaRPr lang="en-US" sz="700" dirty="0"/>
           </a:p>
@@ -2692,53 +2731,14 @@
       </p:sp>
       <p:sp>
         <p:nvSpPr>
-          <p:cNvPr id="50" name="Text 48"/>
-          <p:cNvSpPr/>
-          <p:nvPr/>
-        </p:nvSpPr>
-        <p:spPr>
-          <a:xfrm>
-            <a:off x="415826" y="3572917"/>
-            <a:ext cx="2606183" cy="95250"/>
-          </a:xfrm>
-          <a:prstGeom prst="rect">
-            <a:avLst/>
-          </a:prstGeom>
-          <a:noFill/>
-          <a:ln/>
-        </p:spPr>
-        <p:txBody>
-          <a:bodyPr wrap="square" lIns="0" tIns="0" rIns="0" bIns="0" rtlCol="0" anchor="t"/>
-          <a:lstStyle/>
-          <a:p>
-            <a:pPr algn="l" indent="0" marL="0">
-              <a:buNone/>
-            </a:pPr>
-            <a:r>
-              <a:rPr lang="en-US" sz="700" dirty="0">
-                <a:solidFill>
-                  <a:srgbClr val="666666"/>
-                </a:solidFill>
-                <a:latin typeface="Times New Roman" pitchFamily="34" charset="0"/>
-                <a:ea typeface="Times New Roman" pitchFamily="34" charset="-122"/>
-                <a:cs typeface="Times New Roman" pitchFamily="34" charset="-120"/>
-              </a:rPr>
-              <a:t>MLFQ: Periodic Boost (all → Q0)</a:t>
-            </a:r>
-            <a:endParaRPr lang="en-US" sz="700" dirty="0"/>
-          </a:p>
-        </p:txBody>
-      </p:sp>
-      <p:sp>
-        <p:nvSpPr>
           <p:cNvPr id="51" name="Text 49"/>
           <p:cNvSpPr/>
           <p:nvPr/>
         </p:nvSpPr>
         <p:spPr>
           <a:xfrm>
-            <a:off x="3183434" y="3299966"/>
-            <a:ext cx="2777133" cy="441127"/>
+            <a:off x="3183434" y="3471416"/>
+            <a:ext cx="2777133" cy="479227"/>
           </a:xfrm>
           <a:prstGeom prst="rect">
             <a:avLst/>
@@ -2769,7 +2769,46 @@
         </p:nvSpPr>
         <p:spPr>
           <a:xfrm>
-            <a:off x="3294459" y="3372892"/>
+            <a:off x="3294459" y="3544342"/>
+            <a:ext cx="2606183" cy="123825"/>
+          </a:xfrm>
+          <a:prstGeom prst="rect">
+            <a:avLst/>
+          </a:prstGeom>
+          <a:noFill/>
+          <a:ln/>
+        </p:spPr>
+        <p:txBody>
+          <a:bodyPr wrap="square" lIns="0" tIns="0" rIns="0" bIns="0" rtlCol="0" anchor="t"/>
+          <a:lstStyle/>
+          <a:p>
+            <a:pPr algn="l" indent="0" marL="0">
+              <a:buNone/>
+            </a:pPr>
+            <a:r>
+              <a:rPr lang="en-US" sz="800" b="1" dirty="0">
+                <a:solidFill>
+                  <a:srgbClr val="333333"/>
+                </a:solidFill>
+                <a:latin typeface="Malgun Gothic" pitchFamily="34" charset="0"/>
+                <a:ea typeface="Malgun Gothic" pitchFamily="34" charset="-122"/>
+                <a:cs typeface="Malgun Gothic" pitchFamily="34" charset="-120"/>
+              </a:rPr>
+              <a:t>MLFQ 선점</a:t>
+            </a:r>
+            <a:endParaRPr lang="en-US" sz="800" dirty="0"/>
+          </a:p>
+        </p:txBody>
+      </p:sp>
+      <p:sp>
+        <p:nvSpPr>
+          <p:cNvPr id="53" name="Text 51"/>
+          <p:cNvSpPr/>
+          <p:nvPr/>
+        </p:nvSpPr>
+        <p:spPr>
+          <a:xfrm>
+            <a:off x="3294459" y="3668167"/>
             <a:ext cx="2606183" cy="104775"/>
           </a:xfrm>
           <a:prstGeom prst="rect">
@@ -2786,30 +2825,30 @@
               <a:buNone/>
             </a:pPr>
             <a:r>
-              <a:rPr lang="en-US" sz="800" b="1" dirty="0">
-                <a:solidFill>
-                  <a:srgbClr val="333333"/>
-                </a:solidFill>
-                <a:latin typeface="Times New Roman" pitchFamily="34" charset="0"/>
-                <a:ea typeface="Times New Roman" pitchFamily="34" charset="-122"/>
-                <a:cs typeface="Times New Roman" pitchFamily="34" charset="-120"/>
-              </a:rPr>
-              <a:t>MLFQ Preemption</a:t>
-            </a:r>
-            <a:endParaRPr lang="en-US" sz="800" dirty="0"/>
-          </a:p>
-        </p:txBody>
-      </p:sp>
-      <p:sp>
-        <p:nvSpPr>
-          <p:cNvPr id="53" name="Text 51"/>
-          <p:cNvSpPr/>
-          <p:nvPr/>
-        </p:nvSpPr>
-        <p:spPr>
-          <a:xfrm>
-            <a:off x="3294459" y="3477667"/>
-            <a:ext cx="2606183" cy="95250"/>
+              <a:rPr lang="en-US" sz="700" dirty="0">
+                <a:solidFill>
+                  <a:srgbClr val="666666"/>
+                </a:solidFill>
+                <a:latin typeface="Malgun Gothic" pitchFamily="34" charset="0"/>
+                <a:ea typeface="Malgun Gothic" pitchFamily="34" charset="-122"/>
+                <a:cs typeface="Malgun Gothic" pitchFamily="34" charset="-120"/>
+              </a:rPr>
+              <a:t>시간 슬라이스: 500ms 확인 주기</a:t>
+            </a:r>
+            <a:endParaRPr lang="en-US" sz="700" dirty="0"/>
+          </a:p>
+        </p:txBody>
+      </p:sp>
+      <p:sp>
+        <p:nvSpPr>
+          <p:cNvPr id="54" name="Text 52"/>
+          <p:cNvSpPr/>
+          <p:nvPr/>
+        </p:nvSpPr>
+        <p:spPr>
+          <a:xfrm>
+            <a:off x="3294459" y="3772942"/>
+            <a:ext cx="2606183" cy="104775"/>
           </a:xfrm>
           <a:prstGeom prst="rect">
             <a:avLst/>
@@ -2829,11 +2868,11 @@
                 <a:solidFill>
                   <a:srgbClr val="666666"/>
                 </a:solidFill>
-                <a:latin typeface="Times New Roman" pitchFamily="34" charset="0"/>
-                <a:ea typeface="Times New Roman" pitchFamily="34" charset="-122"/>
-                <a:cs typeface="Times New Roman" pitchFamily="34" charset="-120"/>
-              </a:rPr>
-              <a:t>Time slice: 500ms check interval</a:t>
+                <a:latin typeface="Malgun Gothic" pitchFamily="34" charset="0"/>
+                <a:ea typeface="Malgun Gothic" pitchFamily="34" charset="-122"/>
+                <a:cs typeface="Malgun Gothic" pitchFamily="34" charset="-120"/>
+              </a:rPr>
+              <a:t>퀀텀 초과 → 하위 큐로 이동</a:t>
             </a:r>
             <a:endParaRPr lang="en-US" sz="700" dirty="0"/>
           </a:p>
@@ -2841,53 +2880,14 @@
       </p:sp>
       <p:sp>
         <p:nvSpPr>
-          <p:cNvPr id="54" name="Text 52"/>
-          <p:cNvSpPr/>
-          <p:nvPr/>
-        </p:nvSpPr>
-        <p:spPr>
-          <a:xfrm>
-            <a:off x="3294459" y="3572917"/>
-            <a:ext cx="2606183" cy="95250"/>
-          </a:xfrm>
-          <a:prstGeom prst="rect">
-            <a:avLst/>
-          </a:prstGeom>
-          <a:noFill/>
-          <a:ln/>
-        </p:spPr>
-        <p:txBody>
-          <a:bodyPr wrap="square" lIns="0" tIns="0" rIns="0" bIns="0" rtlCol="0" anchor="t"/>
-          <a:lstStyle/>
-          <a:p>
-            <a:pPr algn="l" indent="0" marL="0">
-              <a:buNone/>
-            </a:pPr>
-            <a:r>
-              <a:rPr lang="en-US" sz="700" dirty="0">
-                <a:solidFill>
-                  <a:srgbClr val="666666"/>
-                </a:solidFill>
-                <a:latin typeface="Times New Roman" pitchFamily="34" charset="0"/>
-                <a:ea typeface="Times New Roman" pitchFamily="34" charset="-122"/>
-                <a:cs typeface="Times New Roman" pitchFamily="34" charset="-120"/>
-              </a:rPr>
-              <a:t>Exceeds quantum → demote to lower queue</a:t>
-            </a:r>
-            <a:endParaRPr lang="en-US" sz="700" dirty="0"/>
-          </a:p>
-        </p:txBody>
-      </p:sp>
-      <p:sp>
-        <p:nvSpPr>
           <p:cNvPr id="55" name="Text 53"/>
           <p:cNvSpPr/>
           <p:nvPr/>
         </p:nvSpPr>
         <p:spPr>
           <a:xfrm>
-            <a:off x="6062067" y="3299966"/>
-            <a:ext cx="2777133" cy="441127"/>
+            <a:off x="6062067" y="3471416"/>
+            <a:ext cx="2777133" cy="479227"/>
           </a:xfrm>
           <a:prstGeom prst="rect">
             <a:avLst/>
@@ -2918,7 +2918,46 @@
         </p:nvSpPr>
         <p:spPr>
           <a:xfrm>
-            <a:off x="6173093" y="3372892"/>
+            <a:off x="6173093" y="3544342"/>
+            <a:ext cx="2606183" cy="123825"/>
+          </a:xfrm>
+          <a:prstGeom prst="rect">
+            <a:avLst/>
+          </a:prstGeom>
+          <a:noFill/>
+          <a:ln/>
+        </p:spPr>
+        <p:txBody>
+          <a:bodyPr wrap="square" lIns="0" tIns="0" rIns="0" bIns="0" rtlCol="0" anchor="t"/>
+          <a:lstStyle/>
+          <a:p>
+            <a:pPr algn="l" indent="0" marL="0">
+              <a:buNone/>
+            </a:pPr>
+            <a:r>
+              <a:rPr lang="en-US" sz="800" b="1" dirty="0">
+                <a:solidFill>
+                  <a:srgbClr val="333333"/>
+                </a:solidFill>
+                <a:latin typeface="Malgun Gothic" pitchFamily="34" charset="0"/>
+                <a:ea typeface="Malgun Gothic" pitchFamily="34" charset="-122"/>
+                <a:cs typeface="Malgun Gothic" pitchFamily="34" charset="-120"/>
+              </a:rPr>
+              <a:t>이중 수준 공정성</a:t>
+            </a:r>
+            <a:endParaRPr lang="en-US" sz="800" dirty="0"/>
+          </a:p>
+        </p:txBody>
+      </p:sp>
+      <p:sp>
+        <p:nvSpPr>
+          <p:cNvPr id="57" name="Text 55"/>
+          <p:cNvSpPr/>
+          <p:nvPr/>
+        </p:nvSpPr>
+        <p:spPr>
+          <a:xfrm>
+            <a:off x="6173093" y="3668167"/>
             <a:ext cx="2606183" cy="104775"/>
           </a:xfrm>
           <a:prstGeom prst="rect">
@@ -2935,30 +2974,30 @@
               <a:buNone/>
             </a:pPr>
             <a:r>
-              <a:rPr lang="en-US" sz="800" b="1" dirty="0">
-                <a:solidFill>
-                  <a:srgbClr val="333333"/>
-                </a:solidFill>
-                <a:latin typeface="Times New Roman" pitchFamily="34" charset="0"/>
-                <a:ea typeface="Times New Roman" pitchFamily="34" charset="-122"/>
-                <a:cs typeface="Times New Roman" pitchFamily="34" charset="-120"/>
-              </a:rPr>
-              <a:t>Dual-Level Fairness</a:t>
-            </a:r>
-            <a:endParaRPr lang="en-US" sz="800" dirty="0"/>
-          </a:p>
-        </p:txBody>
-      </p:sp>
-      <p:sp>
-        <p:nvSpPr>
-          <p:cNvPr id="57" name="Text 55"/>
-          <p:cNvSpPr/>
-          <p:nvPr/>
-        </p:nvSpPr>
-        <p:spPr>
-          <a:xfrm>
-            <a:off x="6173093" y="3477667"/>
-            <a:ext cx="2606183" cy="95250"/>
+              <a:rPr lang="en-US" sz="700" dirty="0">
+                <a:solidFill>
+                  <a:srgbClr val="666666"/>
+                </a:solidFill>
+                <a:latin typeface="Malgun Gothic" pitchFamily="34" charset="0"/>
+                <a:ea typeface="Malgun Gothic" pitchFamily="34" charset="-122"/>
+                <a:cs typeface="Malgun Gothic" pitchFamily="34" charset="-120"/>
+              </a:rPr>
+              <a:t>시스템 JFI: 전체 테넌트 간</a:t>
+            </a:r>
+            <a:endParaRPr lang="en-US" sz="700" dirty="0"/>
+          </a:p>
+        </p:txBody>
+      </p:sp>
+      <p:sp>
+        <p:nvSpPr>
+          <p:cNvPr id="58" name="Text 56"/>
+          <p:cNvSpPr/>
+          <p:nvPr/>
+        </p:nvSpPr>
+        <p:spPr>
+          <a:xfrm>
+            <a:off x="6173093" y="3772942"/>
+            <a:ext cx="2606183" cy="104775"/>
           </a:xfrm>
           <a:prstGeom prst="rect">
             <a:avLst/>
@@ -2978,11 +3017,11 @@
                 <a:solidFill>
                   <a:srgbClr val="666666"/>
                 </a:solidFill>
-                <a:latin typeface="Times New Roman" pitchFamily="34" charset="0"/>
-                <a:ea typeface="Times New Roman" pitchFamily="34" charset="-122"/>
-                <a:cs typeface="Times New Roman" pitchFamily="34" charset="-120"/>
-              </a:rPr>
-              <a:t>System JFI: across all tenants</a:t>
+                <a:latin typeface="Malgun Gothic" pitchFamily="34" charset="0"/>
+                <a:ea typeface="Malgun Gothic" pitchFamily="34" charset="-122"/>
+                <a:cs typeface="Malgun Gothic" pitchFamily="34" charset="-120"/>
+              </a:rPr>
+              <a:t>테넌트 JFI: 동일 등급 내 (0.92~0.98)</a:t>
             </a:r>
             <a:endParaRPr lang="en-US" sz="700" dirty="0"/>
           </a:p>
@@ -2990,52 +3029,13 @@
       </p:sp>
       <p:sp>
         <p:nvSpPr>
-          <p:cNvPr id="58" name="Text 56"/>
-          <p:cNvSpPr/>
-          <p:nvPr/>
-        </p:nvSpPr>
-        <p:spPr>
-          <a:xfrm>
-            <a:off x="6173093" y="3572917"/>
-            <a:ext cx="2606183" cy="95250"/>
-          </a:xfrm>
-          <a:prstGeom prst="rect">
-            <a:avLst/>
-          </a:prstGeom>
-          <a:noFill/>
-          <a:ln/>
-        </p:spPr>
-        <p:txBody>
-          <a:bodyPr wrap="square" lIns="0" tIns="0" rIns="0" bIns="0" rtlCol="0" anchor="t"/>
-          <a:lstStyle/>
-          <a:p>
-            <a:pPr algn="l" indent="0" marL="0">
-              <a:buNone/>
-            </a:pPr>
-            <a:r>
-              <a:rPr lang="en-US" sz="700" dirty="0">
-                <a:solidFill>
-                  <a:srgbClr val="666666"/>
-                </a:solidFill>
-                <a:latin typeface="Times New Roman" pitchFamily="34" charset="0"/>
-                <a:ea typeface="Times New Roman" pitchFamily="34" charset="-122"/>
-                <a:cs typeface="Times New Roman" pitchFamily="34" charset="-120"/>
-              </a:rPr>
-              <a:t>Tenant JFI: within same tier (0.92~0.98)</a:t>
-            </a:r>
-            <a:endParaRPr lang="en-US" sz="700" dirty="0"/>
-          </a:p>
-        </p:txBody>
-      </p:sp>
-      <p:sp>
-        <p:nvSpPr>
           <p:cNvPr id="59" name="Shape 57"/>
           <p:cNvSpPr/>
           <p:nvPr/>
         </p:nvSpPr>
         <p:spPr>
           <a:xfrm>
-            <a:off x="304800" y="4891236"/>
+            <a:off x="304800" y="4881711"/>
             <a:ext cx="8534400" cy="0"/>
           </a:xfrm>
           <a:prstGeom prst="line">
@@ -3058,8 +3058,8 @@
         </p:nvSpPr>
         <p:spPr>
           <a:xfrm>
-            <a:off x="304800" y="4946749"/>
-            <a:ext cx="8705088" cy="95250"/>
+            <a:off x="304800" y="4937224"/>
+            <a:ext cx="8705088" cy="104775"/>
           </a:xfrm>
           <a:prstGeom prst="rect">
             <a:avLst/>
@@ -3079,11 +3079,11 @@
                 <a:solidFill>
                   <a:srgbClr val="999999"/>
                 </a:solidFill>
-                <a:latin typeface="Times New Roman" pitchFamily="34" charset="0"/>
-                <a:ea typeface="Times New Roman" pitchFamily="34" charset="-122"/>
-                <a:cs typeface="Times New Roman" pitchFamily="34" charset="-120"/>
-              </a:rPr>
-              <a:t>Stack: Node.js 22 LTS + Express.js 4.18 | Storage: Memory Arrays + JSON Files | 307 tests, 99.76% coverage</a:t>
+                <a:latin typeface="Malgun Gothic" pitchFamily="34" charset="0"/>
+                <a:ea typeface="Malgun Gothic" pitchFamily="34" charset="-122"/>
+                <a:cs typeface="Malgun Gothic" pitchFamily="34" charset="-120"/>
+              </a:rPr>
+              <a:t>Node.js 22 LTS + Express.js 4.18 | 메모리 배열 + JSON 파일 | 307 tests, 99.76% coverage</a:t>
             </a:r>
             <a:endParaRPr lang="en-US" sz="700" dirty="0"/>
           </a:p>
